--- a/presentation/UI_presen.pptx
+++ b/presentation/UI_presen.pptx
@@ -5,7 +5,12 @@
     <p:sldMasterId id="2147483648" r:id="rId1"/>
   </p:sldMasterIdLst>
   <p:sldIdLst>
-    <p:sldId id="256" r:id="rId2"/>
+    <p:sldId id="258" r:id="rId2"/>
+    <p:sldId id="260" r:id="rId3"/>
+    <p:sldId id="256" r:id="rId4"/>
+    <p:sldId id="257" r:id="rId5"/>
+    <p:sldId id="263" r:id="rId6"/>
+    <p:sldId id="259" r:id="rId7"/>
   </p:sldIdLst>
   <p:sldSz cx="12192000" cy="6858000"/>
   <p:notesSz cx="6858000" cy="9144000"/>
@@ -104,7 +109,514 @@
       </a:defRPr>
     </a:lvl9pPr>
   </p:defaultTextStyle>
+  <p:extLst>
+    <p:ext uri="{EFAFB233-063F-42B5-8137-9DF3F51BA10A}">
+      <p15:sldGuideLst xmlns:p15="http://schemas.microsoft.com/office/powerpoint/2012/main"/>
+    </p:ext>
+  </p:extLst>
 </p:presentation>
+</file>
+
+<file path=ppt/revisionInfo.xml><?xml version="1.0" encoding="utf-8"?>
+<p1510:revInfo xmlns:a="http://schemas.openxmlformats.org/drawingml/2006/main" xmlns:r="http://schemas.openxmlformats.org/officeDocument/2006/relationships" xmlns:p1510="http://schemas.microsoft.com/office/powerpoint/2015/10/main">
+  <p1510:revLst>
+    <p1510:client id="{13340CA5-F209-4A5C-87B1-30A192ACEF1E}" v="24" dt="2026-07-23T04:47:45.197"/>
+  </p1510:revLst>
+</p1510:revInfo>
+</file>
+
+<file path=ppt/changesInfos/changesInfo1.xml><?xml version="1.0" encoding="utf-8"?>
+<pc:chgInfo xmlns:a="http://schemas.openxmlformats.org/drawingml/2006/main" xmlns:r="http://schemas.openxmlformats.org/officeDocument/2006/relationships" xmlns:ac="http://schemas.microsoft.com/office/drawing/2013/main/command" xmlns:pc="http://schemas.microsoft.com/office/powerpoint/2013/main/command">
+  <pc:docChgLst>
+    <pc:chgData name="結月 梁瀬" userId="1f3453c015a41521" providerId="LiveId" clId="{437E0789-DA0B-425A-8B39-711296BAB4E1}"/>
+    <pc:docChg chg="undo custSel addSld delSld modSld sldOrd">
+      <pc:chgData name="結月 梁瀬" userId="1f3453c015a41521" providerId="LiveId" clId="{437E0789-DA0B-425A-8B39-711296BAB4E1}" dt="2026-07-23T04:48:54.965" v="2733" actId="1076"/>
+      <pc:docMkLst>
+        <pc:docMk/>
+      </pc:docMkLst>
+      <pc:sldChg chg="addSp delSp modSp mod">
+        <pc:chgData name="結月 梁瀬" userId="1f3453c015a41521" providerId="LiveId" clId="{437E0789-DA0B-425A-8B39-711296BAB4E1}" dt="2026-07-23T02:43:16.979" v="782" actId="1076"/>
+        <pc:sldMkLst>
+          <pc:docMk/>
+          <pc:sldMk cId="3106124702" sldId="256"/>
+        </pc:sldMkLst>
+        <pc:spChg chg="add del mod">
+          <ac:chgData name="結月 梁瀬" userId="1f3453c015a41521" providerId="LiveId" clId="{437E0789-DA0B-425A-8B39-711296BAB4E1}" dt="2026-07-23T02:31:39.886" v="276" actId="20577"/>
+          <ac:spMkLst>
+            <pc:docMk/>
+            <pc:sldMk cId="3106124702" sldId="256"/>
+            <ac:spMk id="4" creationId="{53C81E2E-813F-643F-A4C6-2A801E7736F0}"/>
+          </ac:spMkLst>
+        </pc:spChg>
+        <pc:spChg chg="mod">
+          <ac:chgData name="結月 梁瀬" userId="1f3453c015a41521" providerId="LiveId" clId="{437E0789-DA0B-425A-8B39-711296BAB4E1}" dt="2026-07-23T02:43:16.979" v="782" actId="1076"/>
+          <ac:spMkLst>
+            <pc:docMk/>
+            <pc:sldMk cId="3106124702" sldId="256"/>
+            <ac:spMk id="6" creationId="{1D032682-6069-7B2F-E5BA-AFFE2ACFFFB5}"/>
+          </ac:spMkLst>
+        </pc:spChg>
+        <pc:spChg chg="del">
+          <ac:chgData name="結月 梁瀬" userId="1f3453c015a41521" providerId="LiveId" clId="{437E0789-DA0B-425A-8B39-711296BAB4E1}" dt="2026-07-23T02:32:02.244" v="280" actId="21"/>
+          <ac:spMkLst>
+            <pc:docMk/>
+            <pc:sldMk cId="3106124702" sldId="256"/>
+            <ac:spMk id="7" creationId="{D63F4DBE-4D2A-98BA-F20C-F4A58884764D}"/>
+          </ac:spMkLst>
+        </pc:spChg>
+        <pc:picChg chg="add del mod">
+          <ac:chgData name="結月 梁瀬" userId="1f3453c015a41521" providerId="LiveId" clId="{437E0789-DA0B-425A-8B39-711296BAB4E1}" dt="2026-07-23T02:31:59.574" v="279" actId="21"/>
+          <ac:picMkLst>
+            <pc:docMk/>
+            <pc:sldMk cId="3106124702" sldId="256"/>
+            <ac:picMk id="5" creationId="{76366021-CA4C-3D26-8410-65CE77286565}"/>
+          </ac:picMkLst>
+        </pc:picChg>
+        <pc:picChg chg="add mod">
+          <ac:chgData name="結月 梁瀬" userId="1f3453c015a41521" providerId="LiveId" clId="{437E0789-DA0B-425A-8B39-711296BAB4E1}" dt="2026-07-23T02:39:44.595" v="602" actId="1076"/>
+          <ac:picMkLst>
+            <pc:docMk/>
+            <pc:sldMk cId="3106124702" sldId="256"/>
+            <ac:picMk id="9" creationId="{D84BC9B6-0E46-BA33-BDD0-F961118AB583}"/>
+          </ac:picMkLst>
+        </pc:picChg>
+        <pc:picChg chg="add mod">
+          <ac:chgData name="結月 梁瀬" userId="1f3453c015a41521" providerId="LiveId" clId="{437E0789-DA0B-425A-8B39-711296BAB4E1}" dt="2026-07-23T02:40:07.934" v="621" actId="1076"/>
+          <ac:picMkLst>
+            <pc:docMk/>
+            <pc:sldMk cId="3106124702" sldId="256"/>
+            <ac:picMk id="11" creationId="{30888332-12C1-6AD1-F9FD-B939D0A113A3}"/>
+          </ac:picMkLst>
+        </pc:picChg>
+        <pc:cxnChg chg="add del mod">
+          <ac:chgData name="結月 梁瀬" userId="1f3453c015a41521" providerId="LiveId" clId="{437E0789-DA0B-425A-8B39-711296BAB4E1}" dt="2026-07-23T02:40:29.292" v="629" actId="11529"/>
+          <ac:cxnSpMkLst>
+            <pc:docMk/>
+            <pc:sldMk cId="3106124702" sldId="256"/>
+            <ac:cxnSpMk id="13" creationId="{13746E4D-EB51-BC6E-114B-2B58FDA493A1}"/>
+          </ac:cxnSpMkLst>
+        </pc:cxnChg>
+        <pc:cxnChg chg="add mod">
+          <ac:chgData name="結月 梁瀬" userId="1f3453c015a41521" providerId="LiveId" clId="{437E0789-DA0B-425A-8B39-711296BAB4E1}" dt="2026-07-23T02:41:20.158" v="633" actId="208"/>
+          <ac:cxnSpMkLst>
+            <pc:docMk/>
+            <pc:sldMk cId="3106124702" sldId="256"/>
+            <ac:cxnSpMk id="17" creationId="{D2B11A59-BD72-4154-60BA-4E3BB2C03F82}"/>
+          </ac:cxnSpMkLst>
+        </pc:cxnChg>
+      </pc:sldChg>
+      <pc:sldChg chg="addSp delSp modSp add mod">
+        <pc:chgData name="結月 梁瀬" userId="1f3453c015a41521" providerId="LiveId" clId="{437E0789-DA0B-425A-8B39-711296BAB4E1}" dt="2026-07-23T04:10:44.177" v="1611" actId="1076"/>
+        <pc:sldMkLst>
+          <pc:docMk/>
+          <pc:sldMk cId="4195209715" sldId="257"/>
+        </pc:sldMkLst>
+        <pc:spChg chg="mod">
+          <ac:chgData name="結月 梁瀬" userId="1f3453c015a41521" providerId="LiveId" clId="{437E0789-DA0B-425A-8B39-711296BAB4E1}" dt="2026-07-23T02:36:32.249" v="361" actId="20577"/>
+          <ac:spMkLst>
+            <pc:docMk/>
+            <pc:sldMk cId="4195209715" sldId="257"/>
+            <ac:spMk id="4" creationId="{8469E831-C139-177B-105F-D94164F40CEF}"/>
+          </ac:spMkLst>
+        </pc:spChg>
+        <pc:spChg chg="del mod">
+          <ac:chgData name="結月 梁瀬" userId="1f3453c015a41521" providerId="LiveId" clId="{437E0789-DA0B-425A-8B39-711296BAB4E1}" dt="2026-07-23T02:43:34.237" v="783" actId="21"/>
+          <ac:spMkLst>
+            <pc:docMk/>
+            <pc:sldMk cId="4195209715" sldId="257"/>
+            <ac:spMk id="6" creationId="{46D25EE3-5F81-C4F6-5C9D-A64F5E1C9204}"/>
+          </ac:spMkLst>
+        </pc:spChg>
+        <pc:spChg chg="del">
+          <ac:chgData name="結月 梁瀬" userId="1f3453c015a41521" providerId="LiveId" clId="{437E0789-DA0B-425A-8B39-711296BAB4E1}" dt="2026-07-23T02:33:52.071" v="317" actId="21"/>
+          <ac:spMkLst>
+            <pc:docMk/>
+            <pc:sldMk cId="4195209715" sldId="257"/>
+            <ac:spMk id="7" creationId="{B899D44F-2669-63D4-7B26-4DBBC723E221}"/>
+          </ac:spMkLst>
+        </pc:spChg>
+        <pc:spChg chg="add del">
+          <ac:chgData name="結月 梁瀬" userId="1f3453c015a41521" providerId="LiveId" clId="{437E0789-DA0B-425A-8B39-711296BAB4E1}" dt="2026-07-23T02:44:29.755" v="799" actId="11529"/>
+          <ac:spMkLst>
+            <pc:docMk/>
+            <pc:sldMk cId="4195209715" sldId="257"/>
+            <ac:spMk id="11" creationId="{E867B7C2-3FA4-952E-80E2-F46AC3994684}"/>
+          </ac:spMkLst>
+        </pc:spChg>
+        <pc:spChg chg="add mod">
+          <ac:chgData name="結月 梁瀬" userId="1f3453c015a41521" providerId="LiveId" clId="{437E0789-DA0B-425A-8B39-711296BAB4E1}" dt="2026-07-23T04:10:29.243" v="1604" actId="1076"/>
+          <ac:spMkLst>
+            <pc:docMk/>
+            <pc:sldMk cId="4195209715" sldId="257"/>
+            <ac:spMk id="12" creationId="{552DBFD8-0005-18A6-8E4C-C658004CA86C}"/>
+          </ac:spMkLst>
+        </pc:spChg>
+        <pc:spChg chg="add mod">
+          <ac:chgData name="結月 梁瀬" userId="1f3453c015a41521" providerId="LiveId" clId="{437E0789-DA0B-425A-8B39-711296BAB4E1}" dt="2026-07-23T04:10:33.576" v="1606" actId="1076"/>
+          <ac:spMkLst>
+            <pc:docMk/>
+            <pc:sldMk cId="4195209715" sldId="257"/>
+            <ac:spMk id="14" creationId="{68E1CD58-568C-5FB5-27F9-FF844E2CCEA6}"/>
+          </ac:spMkLst>
+        </pc:spChg>
+        <pc:picChg chg="add mod">
+          <ac:chgData name="結月 梁瀬" userId="1f3453c015a41521" providerId="LiveId" clId="{437E0789-DA0B-425A-8B39-711296BAB4E1}" dt="2026-07-23T04:10:44.177" v="1611" actId="1076"/>
+          <ac:picMkLst>
+            <pc:docMk/>
+            <pc:sldMk cId="4195209715" sldId="257"/>
+            <ac:picMk id="5" creationId="{2DA5D1F8-E5AB-580E-0E66-1A0C5226006D}"/>
+          </ac:picMkLst>
+        </pc:picChg>
+        <pc:picChg chg="del">
+          <ac:chgData name="結月 梁瀬" userId="1f3453c015a41521" providerId="LiveId" clId="{437E0789-DA0B-425A-8B39-711296BAB4E1}" dt="2026-07-23T02:33:49.104" v="316" actId="21"/>
+          <ac:picMkLst>
+            <pc:docMk/>
+            <pc:sldMk cId="4195209715" sldId="257"/>
+            <ac:picMk id="5" creationId="{B1FACB40-2A19-D9F9-1BC8-8BAE9D03A744}"/>
+          </ac:picMkLst>
+        </pc:picChg>
+        <pc:picChg chg="add mod">
+          <ac:chgData name="結月 梁瀬" userId="1f3453c015a41521" providerId="LiveId" clId="{437E0789-DA0B-425A-8B39-711296BAB4E1}" dt="2026-07-23T04:10:42.179" v="1610" actId="1076"/>
+          <ac:picMkLst>
+            <pc:docMk/>
+            <pc:sldMk cId="4195209715" sldId="257"/>
+            <ac:picMk id="7" creationId="{787EBA48-5CBC-582B-761E-B606A0FC9D3C}"/>
+          </ac:picMkLst>
+        </pc:picChg>
+        <pc:picChg chg="add del mod">
+          <ac:chgData name="結月 梁瀬" userId="1f3453c015a41521" providerId="LiveId" clId="{437E0789-DA0B-425A-8B39-711296BAB4E1}" dt="2026-07-23T04:09:40.751" v="1591" actId="21"/>
+          <ac:picMkLst>
+            <pc:docMk/>
+            <pc:sldMk cId="4195209715" sldId="257"/>
+            <ac:picMk id="8" creationId="{E6EC17F2-05A3-328C-8957-4AF6176DAACA}"/>
+          </ac:picMkLst>
+        </pc:picChg>
+        <pc:picChg chg="add del mod">
+          <ac:chgData name="結月 梁瀬" userId="1f3453c015a41521" providerId="LiveId" clId="{437E0789-DA0B-425A-8B39-711296BAB4E1}" dt="2026-07-23T04:09:42.843" v="1592" actId="21"/>
+          <ac:picMkLst>
+            <pc:docMk/>
+            <pc:sldMk cId="4195209715" sldId="257"/>
+            <ac:picMk id="10" creationId="{A9B4EC9F-75B9-C7F9-6E0C-548204A6CEAD}"/>
+          </ac:picMkLst>
+        </pc:picChg>
+      </pc:sldChg>
+      <pc:sldChg chg="addSp delSp modSp add mod ord">
+        <pc:chgData name="結月 梁瀬" userId="1f3453c015a41521" providerId="LiveId" clId="{437E0789-DA0B-425A-8B39-711296BAB4E1}" dt="2026-07-23T04:48:54.965" v="2733" actId="1076"/>
+        <pc:sldMkLst>
+          <pc:docMk/>
+          <pc:sldMk cId="3309598603" sldId="258"/>
+        </pc:sldMkLst>
+        <pc:spChg chg="add mod">
+          <ac:chgData name="結月 梁瀬" userId="1f3453c015a41521" providerId="LiveId" clId="{437E0789-DA0B-425A-8B39-711296BAB4E1}" dt="2026-07-23T04:41:15.313" v="2393" actId="767"/>
+          <ac:spMkLst>
+            <pc:docMk/>
+            <pc:sldMk cId="3309598603" sldId="258"/>
+            <ac:spMk id="2" creationId="{DD773B6B-14A8-3E36-A06F-B483ECAB2A6A}"/>
+          </ac:spMkLst>
+        </pc:spChg>
+        <pc:spChg chg="mod">
+          <ac:chgData name="結月 梁瀬" userId="1f3453c015a41521" providerId="LiveId" clId="{437E0789-DA0B-425A-8B39-711296BAB4E1}" dt="2026-07-23T02:45:51.519" v="877" actId="20577"/>
+          <ac:spMkLst>
+            <pc:docMk/>
+            <pc:sldMk cId="3309598603" sldId="258"/>
+            <ac:spMk id="4" creationId="{CB0932DD-BBCF-50AB-90F4-36024746D90D}"/>
+          </ac:spMkLst>
+        </pc:spChg>
+        <pc:spChg chg="mod">
+          <ac:chgData name="結月 梁瀬" userId="1f3453c015a41521" providerId="LiveId" clId="{437E0789-DA0B-425A-8B39-711296BAB4E1}" dt="2026-07-23T04:48:54.965" v="2733" actId="1076"/>
+          <ac:spMkLst>
+            <pc:docMk/>
+            <pc:sldMk cId="3309598603" sldId="258"/>
+            <ac:spMk id="6" creationId="{61B01C07-D794-BAE6-0852-01507CD11791}"/>
+          </ac:spMkLst>
+        </pc:spChg>
+        <pc:spChg chg="del">
+          <ac:chgData name="結月 梁瀬" userId="1f3453c015a41521" providerId="LiveId" clId="{437E0789-DA0B-425A-8B39-711296BAB4E1}" dt="2026-07-23T02:45:29.914" v="851" actId="21"/>
+          <ac:spMkLst>
+            <pc:docMk/>
+            <pc:sldMk cId="3309598603" sldId="258"/>
+            <ac:spMk id="7" creationId="{A78D6EB4-3268-E0A6-FE65-3D4FD2129945}"/>
+          </ac:spMkLst>
+        </pc:spChg>
+        <pc:picChg chg="del">
+          <ac:chgData name="結月 梁瀬" userId="1f3453c015a41521" providerId="LiveId" clId="{437E0789-DA0B-425A-8B39-711296BAB4E1}" dt="2026-07-23T02:45:26.792" v="850" actId="21"/>
+          <ac:picMkLst>
+            <pc:docMk/>
+            <pc:sldMk cId="3309598603" sldId="258"/>
+            <ac:picMk id="5" creationId="{7B039DAD-3C92-7EE6-FAAD-7242A712E34D}"/>
+          </ac:picMkLst>
+        </pc:picChg>
+      </pc:sldChg>
+      <pc:sldChg chg="addSp delSp modSp add mod">
+        <pc:chgData name="結月 梁瀬" userId="1f3453c015a41521" providerId="LiveId" clId="{437E0789-DA0B-425A-8B39-711296BAB4E1}" dt="2026-07-23T04:48:46.170" v="2732" actId="1076"/>
+        <pc:sldMkLst>
+          <pc:docMk/>
+          <pc:sldMk cId="3293900075" sldId="259"/>
+        </pc:sldMkLst>
+        <pc:spChg chg="add mod">
+          <ac:chgData name="結月 梁瀬" userId="1f3453c015a41521" providerId="LiveId" clId="{437E0789-DA0B-425A-8B39-711296BAB4E1}" dt="2026-07-23T04:47:39.393" v="2651" actId="1076"/>
+          <ac:spMkLst>
+            <pc:docMk/>
+            <pc:sldMk cId="3293900075" sldId="259"/>
+            <ac:spMk id="2" creationId="{983415A0-6009-8D06-5CE2-216DABAEF79E}"/>
+          </ac:spMkLst>
+        </pc:spChg>
+        <pc:spChg chg="add del mod">
+          <ac:chgData name="結月 梁瀬" userId="1f3453c015a41521" providerId="LiveId" clId="{437E0789-DA0B-425A-8B39-711296BAB4E1}" dt="2026-07-23T02:47:31.378" v="895" actId="47"/>
+          <ac:spMkLst>
+            <pc:docMk/>
+            <pc:sldMk cId="3293900075" sldId="259"/>
+            <ac:spMk id="4" creationId="{4157E850-9A3B-B099-1B8A-FA5A78E6DCBD}"/>
+          </ac:spMkLst>
+        </pc:spChg>
+        <pc:spChg chg="del">
+          <ac:chgData name="結月 梁瀬" userId="1f3453c015a41521" providerId="LiveId" clId="{437E0789-DA0B-425A-8B39-711296BAB4E1}" dt="2026-07-23T02:47:15.510" v="886" actId="21"/>
+          <ac:spMkLst>
+            <pc:docMk/>
+            <pc:sldMk cId="3293900075" sldId="259"/>
+            <ac:spMk id="6" creationId="{6F8BAAAE-03C6-0D98-1592-6F0F682CD84A}"/>
+          </ac:spMkLst>
+        </pc:spChg>
+        <pc:spChg chg="add del mod">
+          <ac:chgData name="結月 梁瀬" userId="1f3453c015a41521" providerId="LiveId" clId="{437E0789-DA0B-425A-8B39-711296BAB4E1}" dt="2026-07-23T04:48:31.916" v="2728"/>
+          <ac:spMkLst>
+            <pc:docMk/>
+            <pc:sldMk cId="3293900075" sldId="259"/>
+            <ac:spMk id="7" creationId="{A52B261F-1FBA-0350-05CA-937A18E5CCB7}"/>
+          </ac:spMkLst>
+        </pc:spChg>
+        <pc:spChg chg="del">
+          <ac:chgData name="結月 梁瀬" userId="1f3453c015a41521" providerId="LiveId" clId="{437E0789-DA0B-425A-8B39-711296BAB4E1}" dt="2026-07-23T02:47:02.061" v="880" actId="21"/>
+          <ac:spMkLst>
+            <pc:docMk/>
+            <pc:sldMk cId="3293900075" sldId="259"/>
+            <ac:spMk id="7" creationId="{C0635CC5-0049-C595-D0EF-81CEA2C2B5C2}"/>
+          </ac:spMkLst>
+        </pc:spChg>
+        <pc:spChg chg="add mod">
+          <ac:chgData name="結月 梁瀬" userId="1f3453c015a41521" providerId="LiveId" clId="{437E0789-DA0B-425A-8B39-711296BAB4E1}" dt="2026-07-23T04:48:46.170" v="2732" actId="1076"/>
+          <ac:spMkLst>
+            <pc:docMk/>
+            <pc:sldMk cId="3293900075" sldId="259"/>
+            <ac:spMk id="9" creationId="{824326BC-9ABD-2148-3957-6EC8FD693603}"/>
+          </ac:spMkLst>
+        </pc:spChg>
+        <pc:spChg chg="add mod">
+          <ac:chgData name="結月 梁瀬" userId="1f3453c015a41521" providerId="LiveId" clId="{437E0789-DA0B-425A-8B39-711296BAB4E1}" dt="2026-07-23T03:33:49.641" v="1196" actId="20577"/>
+          <ac:spMkLst>
+            <pc:docMk/>
+            <pc:sldMk cId="3293900075" sldId="259"/>
+            <ac:spMk id="10" creationId="{D42C2198-CBE5-B240-4124-D8CBCDDB71D8}"/>
+          </ac:spMkLst>
+        </pc:spChg>
+        <pc:spChg chg="add del mod">
+          <ac:chgData name="結月 梁瀬" userId="1f3453c015a41521" providerId="LiveId" clId="{437E0789-DA0B-425A-8B39-711296BAB4E1}" dt="2026-07-23T03:33:16.508" v="1123" actId="21"/>
+          <ac:spMkLst>
+            <pc:docMk/>
+            <pc:sldMk cId="3293900075" sldId="259"/>
+            <ac:spMk id="12" creationId="{164BB177-623D-66AC-C98B-2ABEB07832A1}"/>
+          </ac:spMkLst>
+        </pc:spChg>
+        <pc:picChg chg="del">
+          <ac:chgData name="結月 梁瀬" userId="1f3453c015a41521" providerId="LiveId" clId="{437E0789-DA0B-425A-8B39-711296BAB4E1}" dt="2026-07-23T02:45:33.857" v="852" actId="21"/>
+          <ac:picMkLst>
+            <pc:docMk/>
+            <pc:sldMk cId="3293900075" sldId="259"/>
+            <ac:picMk id="5" creationId="{BACD36C3-D73D-9F3C-DA7E-09704267EB5D}"/>
+          </ac:picMkLst>
+        </pc:picChg>
+        <pc:picChg chg="add mod">
+          <ac:chgData name="結月 梁瀬" userId="1f3453c015a41521" providerId="LiveId" clId="{437E0789-DA0B-425A-8B39-711296BAB4E1}" dt="2026-07-23T04:48:41.982" v="2731" actId="1076"/>
+          <ac:picMkLst>
+            <pc:docMk/>
+            <pc:sldMk cId="3293900075" sldId="259"/>
+            <ac:picMk id="6" creationId="{5DD1AC86-8503-4646-DC9B-D1B40765E697}"/>
+          </ac:picMkLst>
+        </pc:picChg>
+        <pc:picChg chg="add del mod">
+          <ac:chgData name="結月 梁瀬" userId="1f3453c015a41521" providerId="LiveId" clId="{437E0789-DA0B-425A-8B39-711296BAB4E1}" dt="2026-07-23T03:36:12.329" v="1295" actId="1076"/>
+          <ac:picMkLst>
+            <pc:docMk/>
+            <pc:sldMk cId="3293900075" sldId="259"/>
+            <ac:picMk id="8" creationId="{045E576B-0405-E283-5CCB-C483EA065636}"/>
+          </ac:picMkLst>
+        </pc:picChg>
+      </pc:sldChg>
+      <pc:sldChg chg="delSp modSp add mod ord">
+        <pc:chgData name="結月 梁瀬" userId="1f3453c015a41521" providerId="LiveId" clId="{437E0789-DA0B-425A-8B39-711296BAB4E1}" dt="2026-07-23T03:41:38.437" v="1475" actId="1076"/>
+        <pc:sldMkLst>
+          <pc:docMk/>
+          <pc:sldMk cId="3491099242" sldId="260"/>
+        </pc:sldMkLst>
+        <pc:spChg chg="mod">
+          <ac:chgData name="結月 梁瀬" userId="1f3453c015a41521" providerId="LiveId" clId="{437E0789-DA0B-425A-8B39-711296BAB4E1}" dt="2026-07-23T02:28:59.371" v="40" actId="20577"/>
+          <ac:spMkLst>
+            <pc:docMk/>
+            <pc:sldMk cId="3491099242" sldId="260"/>
+            <ac:spMk id="4" creationId="{D9B337C8-B4C1-F898-A745-CC28E88A3F58}"/>
+          </ac:spMkLst>
+        </pc:spChg>
+        <pc:spChg chg="mod">
+          <ac:chgData name="結月 梁瀬" userId="1f3453c015a41521" providerId="LiveId" clId="{437E0789-DA0B-425A-8B39-711296BAB4E1}" dt="2026-07-23T03:41:38.437" v="1475" actId="1076"/>
+          <ac:spMkLst>
+            <pc:docMk/>
+            <pc:sldMk cId="3491099242" sldId="260"/>
+            <ac:spMk id="6" creationId="{E69D2BA7-E0B4-660F-D55C-08928E0C12EA}"/>
+          </ac:spMkLst>
+        </pc:spChg>
+        <pc:spChg chg="del">
+          <ac:chgData name="結月 梁瀬" userId="1f3453c015a41521" providerId="LiveId" clId="{437E0789-DA0B-425A-8B39-711296BAB4E1}" dt="2026-07-23T02:28:31.397" v="8" actId="21"/>
+          <ac:spMkLst>
+            <pc:docMk/>
+            <pc:sldMk cId="3491099242" sldId="260"/>
+            <ac:spMk id="7" creationId="{C7C11DB9-977A-51C0-3630-43D54184B525}"/>
+          </ac:spMkLst>
+        </pc:spChg>
+        <pc:picChg chg="mod">
+          <ac:chgData name="結月 梁瀬" userId="1f3453c015a41521" providerId="LiveId" clId="{437E0789-DA0B-425A-8B39-711296BAB4E1}" dt="2026-07-23T02:33:17.039" v="289" actId="1076"/>
+          <ac:picMkLst>
+            <pc:docMk/>
+            <pc:sldMk cId="3491099242" sldId="260"/>
+            <ac:picMk id="5" creationId="{0DA940A6-D348-D221-A18F-DFA7438EDD6B}"/>
+          </ac:picMkLst>
+        </pc:picChg>
+      </pc:sldChg>
+      <pc:sldChg chg="addSp delSp modSp add del mod ord">
+        <pc:chgData name="結月 梁瀬" userId="1f3453c015a41521" providerId="LiveId" clId="{437E0789-DA0B-425A-8B39-711296BAB4E1}" dt="2026-07-23T03:41:03.987" v="1464" actId="2696"/>
+        <pc:sldMkLst>
+          <pc:docMk/>
+          <pc:sldMk cId="1678222352" sldId="261"/>
+        </pc:sldMkLst>
+        <pc:spChg chg="mod">
+          <ac:chgData name="結月 梁瀬" userId="1f3453c015a41521" providerId="LiveId" clId="{437E0789-DA0B-425A-8B39-711296BAB4E1}" dt="2026-07-23T02:48:19.940" v="966" actId="20577"/>
+          <ac:spMkLst>
+            <pc:docMk/>
+            <pc:sldMk cId="1678222352" sldId="261"/>
+            <ac:spMk id="4" creationId="{289460B8-0E41-6538-64F9-3A6EF47BFF2B}"/>
+          </ac:spMkLst>
+        </pc:spChg>
+        <pc:spChg chg="mod">
+          <ac:chgData name="結月 梁瀬" userId="1f3453c015a41521" providerId="LiveId" clId="{437E0789-DA0B-425A-8B39-711296BAB4E1}" dt="2026-07-23T02:48:55.917" v="970" actId="1076"/>
+          <ac:spMkLst>
+            <pc:docMk/>
+            <pc:sldMk cId="1678222352" sldId="261"/>
+            <ac:spMk id="6" creationId="{5128253D-1351-FFEF-E4E4-41C5C314B53C}"/>
+          </ac:spMkLst>
+        </pc:spChg>
+        <pc:picChg chg="add del mod">
+          <ac:chgData name="結月 梁瀬" userId="1f3453c015a41521" providerId="LiveId" clId="{437E0789-DA0B-425A-8B39-711296BAB4E1}" dt="2026-07-23T03:40:55.164" v="1463" actId="21"/>
+          <ac:picMkLst>
+            <pc:docMk/>
+            <pc:sldMk cId="1678222352" sldId="261"/>
+            <ac:picMk id="5" creationId="{B591A599-156C-EBBA-C893-E25598C3BDDB}"/>
+          </ac:picMkLst>
+        </pc:picChg>
+        <pc:picChg chg="add del mod">
+          <ac:chgData name="結月 梁瀬" userId="1f3453c015a41521" providerId="LiveId" clId="{437E0789-DA0B-425A-8B39-711296BAB4E1}" dt="2026-07-23T03:25:55.768" v="1122" actId="21"/>
+          <ac:picMkLst>
+            <pc:docMk/>
+            <pc:sldMk cId="1678222352" sldId="261"/>
+            <ac:picMk id="8" creationId="{D225D918-EDDB-9657-092D-923C726B4E9C}"/>
+          </ac:picMkLst>
+        </pc:picChg>
+      </pc:sldChg>
+      <pc:sldChg chg="addSp delSp modSp add del mod ord">
+        <pc:chgData name="結月 梁瀬" userId="1f3453c015a41521" providerId="LiveId" clId="{437E0789-DA0B-425A-8B39-711296BAB4E1}" dt="2026-07-23T04:47:14.322" v="2637" actId="2696"/>
+        <pc:sldMkLst>
+          <pc:docMk/>
+          <pc:sldMk cId="2288947411" sldId="262"/>
+        </pc:sldMkLst>
+        <pc:spChg chg="mod">
+          <ac:chgData name="結月 梁瀬" userId="1f3453c015a41521" providerId="LiveId" clId="{437E0789-DA0B-425A-8B39-711296BAB4E1}" dt="2026-07-23T03:22:08.750" v="1079" actId="20577"/>
+          <ac:spMkLst>
+            <pc:docMk/>
+            <pc:sldMk cId="2288947411" sldId="262"/>
+            <ac:spMk id="4" creationId="{44A69D81-AAED-867B-F0CC-7DE3EAEC4907}"/>
+          </ac:spMkLst>
+        </pc:spChg>
+        <pc:spChg chg="del">
+          <ac:chgData name="結月 梁瀬" userId="1f3453c015a41521" providerId="LiveId" clId="{437E0789-DA0B-425A-8B39-711296BAB4E1}" dt="2026-07-23T03:22:00.390" v="1057" actId="21"/>
+          <ac:spMkLst>
+            <pc:docMk/>
+            <pc:sldMk cId="2288947411" sldId="262"/>
+            <ac:spMk id="6" creationId="{799137CC-A028-DFAF-3623-8E24968A55AD}"/>
+          </ac:spMkLst>
+        </pc:spChg>
+        <pc:picChg chg="add mod">
+          <ac:chgData name="結月 梁瀬" userId="1f3453c015a41521" providerId="LiveId" clId="{437E0789-DA0B-425A-8B39-711296BAB4E1}" dt="2026-07-23T03:25:00.744" v="1107" actId="14100"/>
+          <ac:picMkLst>
+            <pc:docMk/>
+            <pc:sldMk cId="2288947411" sldId="262"/>
+            <ac:picMk id="5" creationId="{4115AFF5-E97A-FBE6-A0D4-C9BF37076E61}"/>
+          </ac:picMkLst>
+        </pc:picChg>
+        <pc:picChg chg="add mod">
+          <ac:chgData name="結月 梁瀬" userId="1f3453c015a41521" providerId="LiveId" clId="{437E0789-DA0B-425A-8B39-711296BAB4E1}" dt="2026-07-23T03:25:07.217" v="1109" actId="1076"/>
+          <ac:picMkLst>
+            <pc:docMk/>
+            <pc:sldMk cId="2288947411" sldId="262"/>
+            <ac:picMk id="8" creationId="{A117F8AC-AC51-4643-E5CA-F7D4EF41F481}"/>
+          </ac:picMkLst>
+        </pc:picChg>
+        <pc:picChg chg="add mod">
+          <ac:chgData name="結月 梁瀬" userId="1f3453c015a41521" providerId="LiveId" clId="{437E0789-DA0B-425A-8B39-711296BAB4E1}" dt="2026-07-23T03:25:36.228" v="1117" actId="1076"/>
+          <ac:picMkLst>
+            <pc:docMk/>
+            <pc:sldMk cId="2288947411" sldId="262"/>
+            <ac:picMk id="10" creationId="{6AC40ED3-BFA7-3F4B-155B-DA147DCBF55A}"/>
+          </ac:picMkLst>
+        </pc:picChg>
+        <pc:picChg chg="add mod">
+          <ac:chgData name="結月 梁瀬" userId="1f3453c015a41521" providerId="LiveId" clId="{437E0789-DA0B-425A-8B39-711296BAB4E1}" dt="2026-07-23T03:25:38.232" v="1118" actId="1076"/>
+          <ac:picMkLst>
+            <pc:docMk/>
+            <pc:sldMk cId="2288947411" sldId="262"/>
+            <ac:picMk id="12" creationId="{84F2C00F-AC58-4946-4A93-19AEF3DDFBBB}"/>
+          </ac:picMkLst>
+        </pc:picChg>
+        <pc:picChg chg="add mod">
+          <ac:chgData name="結月 梁瀬" userId="1f3453c015a41521" providerId="LiveId" clId="{437E0789-DA0B-425A-8B39-711296BAB4E1}" dt="2026-07-23T03:25:46.645" v="1121" actId="1076"/>
+          <ac:picMkLst>
+            <pc:docMk/>
+            <pc:sldMk cId="2288947411" sldId="262"/>
+            <ac:picMk id="14" creationId="{30EF64DC-ED5B-0BCF-D0C3-01905639F4E2}"/>
+          </ac:picMkLst>
+        </pc:picChg>
+      </pc:sldChg>
+      <pc:sldChg chg="addSp modSp add mod ord">
+        <pc:chgData name="結月 梁瀬" userId="1f3453c015a41521" providerId="LiveId" clId="{437E0789-DA0B-425A-8B39-711296BAB4E1}" dt="2026-07-23T04:45:16.524" v="2632" actId="20577"/>
+        <pc:sldMkLst>
+          <pc:docMk/>
+          <pc:sldMk cId="2171945861" sldId="263"/>
+        </pc:sldMkLst>
+        <pc:spChg chg="mod">
+          <ac:chgData name="結月 梁瀬" userId="1f3453c015a41521" providerId="LiveId" clId="{437E0789-DA0B-425A-8B39-711296BAB4E1}" dt="2026-07-23T03:43:11.542" v="1518" actId="20577"/>
+          <ac:spMkLst>
+            <pc:docMk/>
+            <pc:sldMk cId="2171945861" sldId="263"/>
+            <ac:spMk id="4" creationId="{F4F53D4C-31C0-3555-FC70-F88F4019F57A}"/>
+          </ac:spMkLst>
+        </pc:spChg>
+        <pc:spChg chg="add mod">
+          <ac:chgData name="結月 梁瀬" userId="1f3453c015a41521" providerId="LiveId" clId="{437E0789-DA0B-425A-8B39-711296BAB4E1}" dt="2026-07-23T04:45:16.524" v="2632" actId="20577"/>
+          <ac:spMkLst>
+            <pc:docMk/>
+            <pc:sldMk cId="2171945861" sldId="263"/>
+            <ac:spMk id="5" creationId="{BAA7D06A-EA45-F9CF-5FC5-89A7DCB70E87}"/>
+          </ac:spMkLst>
+        </pc:spChg>
+        <pc:spChg chg="mod">
+          <ac:chgData name="結月 梁瀬" userId="1f3453c015a41521" providerId="LiveId" clId="{437E0789-DA0B-425A-8B39-711296BAB4E1}" dt="2026-07-23T03:43:19.255" v="1531" actId="20577"/>
+          <ac:spMkLst>
+            <pc:docMk/>
+            <pc:sldMk cId="2171945861" sldId="263"/>
+            <ac:spMk id="6" creationId="{E96FEB7E-C844-C8CD-C904-43E847709DB3}"/>
+          </ac:spMkLst>
+        </pc:spChg>
+      </pc:sldChg>
+    </pc:docChg>
+  </pc:docChgLst>
+</pc:chgInfo>
 </file>
 
 <file path=ppt/slideLayouts/slideLayout1.xml><?xml version="1.0" encoding="utf-8"?>
@@ -254,7 +766,7 @@
           <a:p>
             <a:fld id="{ED21A4C6-E72E-43B8-B868-83DE5C82B262}" type="datetimeFigureOut">
               <a:rPr kumimoji="1" lang="ja-JP" altLang="en-US" smtClean="0"/>
-              <a:t>2026/7/22</a:t>
+              <a:t>2026/7/23</a:t>
             </a:fld>
             <a:endParaRPr kumimoji="1" lang="ja-JP" altLang="en-US"/>
           </a:p>
@@ -484,7 +996,7 @@
           <a:p>
             <a:fld id="{ED21A4C6-E72E-43B8-B868-83DE5C82B262}" type="datetimeFigureOut">
               <a:rPr kumimoji="1" lang="ja-JP" altLang="en-US" smtClean="0"/>
-              <a:t>2026/7/22</a:t>
+              <a:t>2026/7/23</a:t>
             </a:fld>
             <a:endParaRPr kumimoji="1" lang="ja-JP" altLang="en-US"/>
           </a:p>
@@ -724,7 +1236,7 @@
           <a:p>
             <a:fld id="{ED21A4C6-E72E-43B8-B868-83DE5C82B262}" type="datetimeFigureOut">
               <a:rPr kumimoji="1" lang="ja-JP" altLang="en-US" smtClean="0"/>
-              <a:t>2026/7/22</a:t>
+              <a:t>2026/7/23</a:t>
             </a:fld>
             <a:endParaRPr kumimoji="1" lang="ja-JP" altLang="en-US"/>
           </a:p>
@@ -954,7 +1466,7 @@
           <a:p>
             <a:fld id="{ED21A4C6-E72E-43B8-B868-83DE5C82B262}" type="datetimeFigureOut">
               <a:rPr kumimoji="1" lang="ja-JP" altLang="en-US" smtClean="0"/>
-              <a:t>2026/7/22</a:t>
+              <a:t>2026/7/23</a:t>
             </a:fld>
             <a:endParaRPr kumimoji="1" lang="ja-JP" altLang="en-US"/>
           </a:p>
@@ -1229,7 +1741,7 @@
           <a:p>
             <a:fld id="{ED21A4C6-E72E-43B8-B868-83DE5C82B262}" type="datetimeFigureOut">
               <a:rPr kumimoji="1" lang="ja-JP" altLang="en-US" smtClean="0"/>
-              <a:t>2026/7/22</a:t>
+              <a:t>2026/7/23</a:t>
             </a:fld>
             <a:endParaRPr kumimoji="1" lang="ja-JP" altLang="en-US"/>
           </a:p>
@@ -1558,7 +2070,7 @@
           <a:p>
             <a:fld id="{ED21A4C6-E72E-43B8-B868-83DE5C82B262}" type="datetimeFigureOut">
               <a:rPr kumimoji="1" lang="ja-JP" altLang="en-US" smtClean="0"/>
-              <a:t>2026/7/22</a:t>
+              <a:t>2026/7/23</a:t>
             </a:fld>
             <a:endParaRPr kumimoji="1" lang="ja-JP" altLang="en-US"/>
           </a:p>
@@ -2034,7 +2546,7 @@
           <a:p>
             <a:fld id="{ED21A4C6-E72E-43B8-B868-83DE5C82B262}" type="datetimeFigureOut">
               <a:rPr kumimoji="1" lang="ja-JP" altLang="en-US" smtClean="0"/>
-              <a:t>2026/7/22</a:t>
+              <a:t>2026/7/23</a:t>
             </a:fld>
             <a:endParaRPr kumimoji="1" lang="ja-JP" altLang="en-US"/>
           </a:p>
@@ -2175,7 +2687,7 @@
           <a:p>
             <a:fld id="{ED21A4C6-E72E-43B8-B868-83DE5C82B262}" type="datetimeFigureOut">
               <a:rPr kumimoji="1" lang="ja-JP" altLang="en-US" smtClean="0"/>
-              <a:t>2026/7/22</a:t>
+              <a:t>2026/7/23</a:t>
             </a:fld>
             <a:endParaRPr kumimoji="1" lang="ja-JP" altLang="en-US"/>
           </a:p>
@@ -2288,7 +2800,7 @@
           <a:p>
             <a:fld id="{ED21A4C6-E72E-43B8-B868-83DE5C82B262}" type="datetimeFigureOut">
               <a:rPr kumimoji="1" lang="ja-JP" altLang="en-US" smtClean="0"/>
-              <a:t>2026/7/22</a:t>
+              <a:t>2026/7/23</a:t>
             </a:fld>
             <a:endParaRPr kumimoji="1" lang="ja-JP" altLang="en-US"/>
           </a:p>
@@ -2631,7 +3143,7 @@
           <a:p>
             <a:fld id="{ED21A4C6-E72E-43B8-B868-83DE5C82B262}" type="datetimeFigureOut">
               <a:rPr kumimoji="1" lang="ja-JP" altLang="en-US" smtClean="0"/>
-              <a:t>2026/7/22</a:t>
+              <a:t>2026/7/23</a:t>
             </a:fld>
             <a:endParaRPr kumimoji="1" lang="ja-JP" altLang="en-US"/>
           </a:p>
@@ -2919,7 +3431,7 @@
           <a:p>
             <a:fld id="{ED21A4C6-E72E-43B8-B868-83DE5C82B262}" type="datetimeFigureOut">
               <a:rPr kumimoji="1" lang="ja-JP" altLang="en-US" smtClean="0"/>
-              <a:t>2026/7/22</a:t>
+              <a:t>2026/7/23</a:t>
             </a:fld>
             <a:endParaRPr kumimoji="1" lang="ja-JP" altLang="en-US"/>
           </a:p>
@@ -3192,7 +3704,7 @@
           <a:p>
             <a:fld id="{ED21A4C6-E72E-43B8-B868-83DE5C82B262}" type="datetimeFigureOut">
               <a:rPr kumimoji="1" lang="ja-JP" altLang="en-US" smtClean="0"/>
-              <a:t>2026/7/22</a:t>
+              <a:t>2026/7/23</a:t>
             </a:fld>
             <a:endParaRPr kumimoji="1" lang="ja-JP" altLang="en-US"/>
           </a:p>
@@ -3612,7 +4124,13 @@
     </p:bg>
     <p:spTree>
       <p:nvGrpSpPr>
-        <p:cNvPr id="1" name=""/>
+        <p:cNvPr id="1" name="">
+          <a:extLst>
+            <a:ext uri="{FF2B5EF4-FFF2-40B4-BE49-F238E27FC236}">
+              <a16:creationId xmlns:a16="http://schemas.microsoft.com/office/drawing/2014/main" id="{80180664-EF68-7640-18C5-B77CE2D21FFD}"/>
+            </a:ext>
+          </a:extLst>
+        </p:cNvPr>
         <p:cNvGrpSpPr/>
         <p:nvPr/>
       </p:nvGrpSpPr>
@@ -3629,7 +4147,7 @@
           <p:cNvPr id="3" name="直線コネクタ 2">
             <a:extLst>
               <a:ext uri="{FF2B5EF4-FFF2-40B4-BE49-F238E27FC236}">
-                <a16:creationId xmlns:a16="http://schemas.microsoft.com/office/drawing/2014/main" id="{5DC24858-B6DA-3594-99D9-171D897CE944}"/>
+                <a16:creationId xmlns:a16="http://schemas.microsoft.com/office/drawing/2014/main" id="{99343978-309E-C9BD-6F87-434FCC5CDA87}"/>
               </a:ext>
             </a:extLst>
           </p:cNvPr>
@@ -3672,7 +4190,7 @@
           <p:cNvPr id="4" name="テキスト ボックス 3">
             <a:extLst>
               <a:ext uri="{FF2B5EF4-FFF2-40B4-BE49-F238E27FC236}">
-                <a16:creationId xmlns:a16="http://schemas.microsoft.com/office/drawing/2014/main" id="{53C81E2E-813F-643F-A4C6-2A801E7736F0}"/>
+                <a16:creationId xmlns:a16="http://schemas.microsoft.com/office/drawing/2014/main" id="{CB0932DD-BBCF-50AB-90F4-36024746D90D}"/>
               </a:ext>
             </a:extLst>
           </p:cNvPr>
@@ -3682,7 +4200,312 @@
         <p:spPr>
           <a:xfrm>
             <a:off x="405635" y="284792"/>
-            <a:ext cx="1840568" cy="707886"/>
+            <a:ext cx="3198311" cy="707886"/>
+          </a:xfrm>
+          <a:prstGeom prst="rect">
+            <a:avLst/>
+          </a:prstGeom>
+          <a:noFill/>
+        </p:spPr>
+        <p:txBody>
+          <a:bodyPr wrap="none" rtlCol="0">
+            <a:spAutoFit/>
+          </a:bodyPr>
+          <a:lstStyle/>
+          <a:p>
+            <a:r>
+              <a:rPr lang="ja-JP" altLang="en-US" sz="4000" dirty="0">
+                <a:solidFill>
+                  <a:schemeClr val="accent3">
+                    <a:lumMod val="50000"/>
+                  </a:schemeClr>
+                </a:solidFill>
+                <a:latin typeface="HGPｺﾞｼｯｸE" panose="020B0900000000000000" pitchFamily="50" charset="-128"/>
+                <a:ea typeface="HGPｺﾞｼｯｸE" panose="020B0900000000000000" pitchFamily="50" charset="-128"/>
+              </a:rPr>
+              <a:t>ゲームの概要</a:t>
+            </a:r>
+            <a:endParaRPr kumimoji="1" lang="en-US" altLang="ja-JP" sz="4000" dirty="0">
+              <a:solidFill>
+                <a:schemeClr val="accent3">
+                  <a:lumMod val="50000"/>
+                </a:schemeClr>
+              </a:solidFill>
+              <a:latin typeface="HGPｺﾞｼｯｸE" panose="020B0900000000000000" pitchFamily="50" charset="-128"/>
+              <a:ea typeface="HGPｺﾞｼｯｸE" panose="020B0900000000000000" pitchFamily="50" charset="-128"/>
+            </a:endParaRPr>
+          </a:p>
+        </p:txBody>
+      </p:sp>
+      <p:sp>
+        <p:nvSpPr>
+          <p:cNvPr id="6" name="テキスト ボックス 5">
+            <a:extLst>
+              <a:ext uri="{FF2B5EF4-FFF2-40B4-BE49-F238E27FC236}">
+                <a16:creationId xmlns:a16="http://schemas.microsoft.com/office/drawing/2014/main" id="{61B01C07-D794-BAE6-0852-01507CD11791}"/>
+              </a:ext>
+            </a:extLst>
+          </p:cNvPr>
+          <p:cNvSpPr txBox="1"/>
+          <p:nvPr/>
+        </p:nvSpPr>
+        <p:spPr>
+          <a:xfrm>
+            <a:off x="1270873" y="1490115"/>
+            <a:ext cx="10719601" cy="4278094"/>
+          </a:xfrm>
+          <a:prstGeom prst="rect">
+            <a:avLst/>
+          </a:prstGeom>
+          <a:noFill/>
+        </p:spPr>
+        <p:txBody>
+          <a:bodyPr wrap="none" rtlCol="0">
+            <a:spAutoFit/>
+          </a:bodyPr>
+          <a:lstStyle/>
+          <a:p>
+            <a:r>
+              <a:rPr lang="ja-JP" altLang="en-US" sz="2400" b="1" dirty="0">
+                <a:latin typeface="BIZ UDPゴシック" panose="020B0400000000000000" pitchFamily="50" charset="-128"/>
+                <a:ea typeface="BIZ UDPゴシック" panose="020B0400000000000000" pitchFamily="50" charset="-128"/>
+              </a:rPr>
+              <a:t>概要</a:t>
+            </a:r>
+            <a:endParaRPr lang="en-US" altLang="ja-JP" sz="2400" b="1" dirty="0">
+              <a:latin typeface="BIZ UDPゴシック" panose="020B0400000000000000" pitchFamily="50" charset="-128"/>
+              <a:ea typeface="BIZ UDPゴシック" panose="020B0400000000000000" pitchFamily="50" charset="-128"/>
+            </a:endParaRPr>
+          </a:p>
+          <a:p>
+            <a:r>
+              <a:rPr lang="ja-JP" altLang="en-US" sz="2400" dirty="0"/>
+              <a:t>敵から逃げ、宝を</a:t>
+            </a:r>
+            <a:r>
+              <a:rPr lang="en-US" altLang="ja-JP" sz="2400" dirty="0"/>
+              <a:t>5</a:t>
+            </a:r>
+            <a:r>
+              <a:rPr lang="ja-JP" altLang="en-US" sz="2400" dirty="0"/>
+              <a:t>つ取れたらクリアする「宝集めゲーム」</a:t>
+            </a:r>
+            <a:endParaRPr lang="en-US" altLang="ja-JP" sz="2400" dirty="0"/>
+          </a:p>
+          <a:p>
+            <a:r>
+              <a:rPr lang="en-US" altLang="ja-JP" sz="2400" dirty="0"/>
+              <a:t>NOMAL</a:t>
+            </a:r>
+            <a:r>
+              <a:rPr lang="ja-JP" altLang="en-US" sz="2400" dirty="0"/>
+              <a:t>モードと</a:t>
+            </a:r>
+            <a:r>
+              <a:rPr lang="en-US" altLang="ja-JP" sz="2400" dirty="0"/>
+              <a:t>HARD</a:t>
+            </a:r>
+            <a:r>
+              <a:rPr lang="ja-JP" altLang="en-US" sz="2400" dirty="0"/>
+              <a:t>モードの</a:t>
+            </a:r>
+            <a:r>
+              <a:rPr lang="en-US" altLang="ja-JP" sz="2400" dirty="0"/>
+              <a:t>2</a:t>
+            </a:r>
+            <a:r>
+              <a:rPr lang="ja-JP" altLang="en-US" sz="2400" dirty="0"/>
+              <a:t>種類</a:t>
+            </a:r>
+            <a:endParaRPr lang="en-US" altLang="ja-JP" sz="2400" dirty="0"/>
+          </a:p>
+          <a:p>
+            <a:endParaRPr lang="en-US" altLang="ja-JP" sz="2400" dirty="0"/>
+          </a:p>
+          <a:p>
+            <a:r>
+              <a:rPr lang="ja-JP" altLang="en-US" sz="2400" b="1" dirty="0"/>
+              <a:t>主な機能</a:t>
+            </a:r>
+            <a:endParaRPr lang="en-US" altLang="ja-JP" sz="2400" b="1" dirty="0"/>
+          </a:p>
+          <a:p>
+            <a:r>
+              <a:rPr lang="ja-JP" altLang="en-US" sz="3200" b="1" dirty="0"/>
+              <a:t>・</a:t>
+            </a:r>
+            <a:r>
+              <a:rPr lang="ja-JP" altLang="ja-JP" sz="2400" b="1" dirty="0"/>
+              <a:t>探索＆宝箱収集</a:t>
+            </a:r>
+            <a:endParaRPr lang="en-US" altLang="ja-JP" sz="2400" b="1" dirty="0"/>
+          </a:p>
+          <a:p>
+            <a:r>
+              <a:rPr lang="ja-JP" altLang="en-US" sz="2400" dirty="0"/>
+              <a:t>　</a:t>
+            </a:r>
+            <a:r>
+              <a:rPr lang="en-US" altLang="ja-JP" sz="2400" dirty="0"/>
+              <a:t>MAP</a:t>
+            </a:r>
+            <a:r>
+              <a:rPr lang="ja-JP" altLang="ja-JP" sz="2400" dirty="0"/>
+              <a:t>内を自由に移動し「全ての宝」をコンプリート回収するメイン機能。</a:t>
+            </a:r>
+            <a:endParaRPr lang="en-US" altLang="ja-JP" sz="3200" b="1" dirty="0"/>
+          </a:p>
+          <a:p>
+            <a:r>
+              <a:rPr lang="ja-JP" altLang="en-US" sz="2400" b="1" dirty="0"/>
+              <a:t>・アイテム</a:t>
+            </a:r>
+            <a:endParaRPr lang="en-US" altLang="ja-JP" sz="2400" b="1" dirty="0"/>
+          </a:p>
+          <a:p>
+            <a:r>
+              <a:rPr lang="ja-JP" altLang="en-US" sz="2400" b="1" dirty="0"/>
+              <a:t>・ギミック</a:t>
+            </a:r>
+            <a:r>
+              <a:rPr lang="en-US" altLang="ja-JP" sz="2400" b="1" dirty="0"/>
+              <a:t>(</a:t>
+            </a:r>
+            <a:r>
+              <a:rPr lang="ja-JP" altLang="en-US" sz="2400" b="1" dirty="0"/>
+              <a:t>仕掛け）</a:t>
+            </a:r>
+            <a:endParaRPr lang="en-US" altLang="ja-JP" sz="2400" b="1" dirty="0"/>
+          </a:p>
+          <a:p>
+            <a:r>
+              <a:rPr lang="ja-JP" altLang="en-US" sz="2400" b="1" dirty="0"/>
+              <a:t>・難易度設定</a:t>
+            </a:r>
+            <a:endParaRPr lang="en-US" altLang="ja-JP" sz="2400" b="1" dirty="0"/>
+          </a:p>
+          <a:p>
+            <a:r>
+              <a:rPr lang="ja-JP" altLang="en-US" sz="2400" b="1" dirty="0"/>
+              <a:t>・メッセージ表示</a:t>
+            </a:r>
+            <a:endParaRPr lang="en-US" altLang="ja-JP" sz="2400" dirty="0">
+              <a:latin typeface="BIZ UDPゴシック" panose="020B0400000000000000" pitchFamily="50" charset="-128"/>
+              <a:ea typeface="BIZ UDPゴシック" panose="020B0400000000000000" pitchFamily="50" charset="-128"/>
+            </a:endParaRPr>
+          </a:p>
+        </p:txBody>
+      </p:sp>
+    </p:spTree>
+    <p:extLst>
+      <p:ext uri="{BB962C8B-B14F-4D97-AF65-F5344CB8AC3E}">
+        <p14:creationId xmlns:p14="http://schemas.microsoft.com/office/powerpoint/2010/main" val="3309598603"/>
+      </p:ext>
+    </p:extLst>
+  </p:cSld>
+  <p:clrMapOvr>
+    <a:masterClrMapping/>
+  </p:clrMapOvr>
+</p:sld>
+</file>
+
+<file path=ppt/slides/slide2.xml><?xml version="1.0" encoding="utf-8"?>
+<p:sld xmlns:a="http://schemas.openxmlformats.org/drawingml/2006/main" xmlns:r="http://schemas.openxmlformats.org/officeDocument/2006/relationships" xmlns:p="http://schemas.openxmlformats.org/presentationml/2006/main">
+  <p:cSld>
+    <p:bg>
+      <p:bgPr>
+        <a:pattFill prst="lgGrid">
+          <a:fgClr>
+            <a:schemeClr val="bg1">
+              <a:lumMod val="85000"/>
+            </a:schemeClr>
+          </a:fgClr>
+          <a:bgClr>
+            <a:schemeClr val="bg1"/>
+          </a:bgClr>
+        </a:pattFill>
+        <a:effectLst/>
+      </p:bgPr>
+    </p:bg>
+    <p:spTree>
+      <p:nvGrpSpPr>
+        <p:cNvPr id="1" name="">
+          <a:extLst>
+            <a:ext uri="{FF2B5EF4-FFF2-40B4-BE49-F238E27FC236}">
+              <a16:creationId xmlns:a16="http://schemas.microsoft.com/office/drawing/2014/main" id="{B3E28372-CB39-42FC-7A3E-E1C094EEAC0E}"/>
+            </a:ext>
+          </a:extLst>
+        </p:cNvPr>
+        <p:cNvGrpSpPr/>
+        <p:nvPr/>
+      </p:nvGrpSpPr>
+      <p:grpSpPr>
+        <a:xfrm>
+          <a:off x="0" y="0"/>
+          <a:ext cx="0" cy="0"/>
+          <a:chOff x="0" y="0"/>
+          <a:chExt cx="0" cy="0"/>
+        </a:xfrm>
+      </p:grpSpPr>
+      <p:cxnSp>
+        <p:nvCxnSpPr>
+          <p:cNvPr id="3" name="直線コネクタ 2">
+            <a:extLst>
+              <a:ext uri="{FF2B5EF4-FFF2-40B4-BE49-F238E27FC236}">
+                <a16:creationId xmlns:a16="http://schemas.microsoft.com/office/drawing/2014/main" id="{78A05BA4-7EAD-BE96-B7AC-7E7FE6BCE0F4}"/>
+              </a:ext>
+            </a:extLst>
+          </p:cNvPr>
+          <p:cNvCxnSpPr>
+            <a:cxnSpLocks/>
+          </p:cNvCxnSpPr>
+          <p:nvPr/>
+        </p:nvCxnSpPr>
+        <p:spPr>
+          <a:xfrm>
+            <a:off x="386585" y="1089791"/>
+            <a:ext cx="2898271" cy="0"/>
+          </a:xfrm>
+          <a:prstGeom prst="line">
+            <a:avLst/>
+          </a:prstGeom>
+          <a:ln w="107950">
+            <a:solidFill>
+              <a:srgbClr val="0C807E"/>
+            </a:solidFill>
+          </a:ln>
+        </p:spPr>
+        <p:style>
+          <a:lnRef idx="1">
+            <a:schemeClr val="accent1"/>
+          </a:lnRef>
+          <a:fillRef idx="0">
+            <a:schemeClr val="accent1"/>
+          </a:fillRef>
+          <a:effectRef idx="0">
+            <a:schemeClr val="accent1"/>
+          </a:effectRef>
+          <a:fontRef idx="minor">
+            <a:schemeClr val="tx1"/>
+          </a:fontRef>
+        </p:style>
+      </p:cxnSp>
+      <p:sp>
+        <p:nvSpPr>
+          <p:cNvPr id="4" name="テキスト ボックス 3">
+            <a:extLst>
+              <a:ext uri="{FF2B5EF4-FFF2-40B4-BE49-F238E27FC236}">
+                <a16:creationId xmlns:a16="http://schemas.microsoft.com/office/drawing/2014/main" id="{D9B337C8-B4C1-F898-A745-CC28E88A3F58}"/>
+              </a:ext>
+            </a:extLst>
+          </p:cNvPr>
+          <p:cNvSpPr txBox="1"/>
+          <p:nvPr/>
+        </p:nvSpPr>
+        <p:spPr>
+          <a:xfrm>
+            <a:off x="405635" y="284792"/>
+            <a:ext cx="2866490" cy="707886"/>
           </a:xfrm>
           <a:prstGeom prst="rect">
             <a:avLst/>
@@ -3705,7 +4528,7 @@
                 <a:latin typeface="HGPｺﾞｼｯｸE" panose="020B0900000000000000" pitchFamily="50" charset="-128"/>
                 <a:ea typeface="HGPｺﾞｼｯｸE" panose="020B0900000000000000" pitchFamily="50" charset="-128"/>
               </a:rPr>
-              <a:t>タイトル</a:t>
+              <a:t>タイトル画面</a:t>
             </a:r>
           </a:p>
         </p:txBody>
@@ -3715,7 +4538,7 @@
           <p:cNvPr id="6" name="テキスト ボックス 5">
             <a:extLst>
               <a:ext uri="{FF2B5EF4-FFF2-40B4-BE49-F238E27FC236}">
-                <a16:creationId xmlns:a16="http://schemas.microsoft.com/office/drawing/2014/main" id="{1D032682-6069-7B2F-E5BA-AFFE2ACFFFB5}"/>
+                <a16:creationId xmlns:a16="http://schemas.microsoft.com/office/drawing/2014/main" id="{E69D2BA7-E0B4-660F-D55C-08928E0C12EA}"/>
               </a:ext>
             </a:extLst>
           </p:cNvPr>
@@ -3724,8 +4547,8 @@
         </p:nvSpPr>
         <p:spPr>
           <a:xfrm>
-            <a:off x="5093961" y="6010275"/>
-            <a:ext cx="2004075" cy="461665"/>
+            <a:off x="6283311" y="2537133"/>
+            <a:ext cx="5694188" cy="2308324"/>
           </a:xfrm>
           <a:prstGeom prst="rect">
             <a:avLst/>
@@ -3743,76 +4566,1982 @@
                 <a:latin typeface="BIZ UDPゴシック" panose="020B0400000000000000" pitchFamily="50" charset="-128"/>
                 <a:ea typeface="BIZ UDPゴシック" panose="020B0400000000000000" pitchFamily="50" charset="-128"/>
               </a:rPr>
-              <a:t>何らかの文字</a:t>
-            </a:r>
-          </a:p>
-        </p:txBody>
-      </p:sp>
-      <p:sp>
-        <p:nvSpPr>
-          <p:cNvPr id="7" name="正方形/長方形 6">
-            <a:extLst>
-              <a:ext uri="{FF2B5EF4-FFF2-40B4-BE49-F238E27FC236}">
-                <a16:creationId xmlns:a16="http://schemas.microsoft.com/office/drawing/2014/main" id="{D63F4DBE-4D2A-98BA-F20C-F4A58884764D}"/>
-              </a:ext>
-            </a:extLst>
-          </p:cNvPr>
-          <p:cNvSpPr/>
+              <a:t>タイトル画面は以下の</a:t>
+            </a:r>
+            <a:r>
+              <a:rPr kumimoji="1" lang="en-US" altLang="ja-JP" sz="2400" dirty="0">
+                <a:latin typeface="BIZ UDPゴシック" panose="020B0400000000000000" pitchFamily="50" charset="-128"/>
+                <a:ea typeface="BIZ UDPゴシック" panose="020B0400000000000000" pitchFamily="50" charset="-128"/>
+              </a:rPr>
+              <a:t>3</a:t>
+            </a:r>
+            <a:r>
+              <a:rPr kumimoji="1" lang="ja-JP" altLang="en-US" sz="2400" dirty="0">
+                <a:latin typeface="BIZ UDPゴシック" panose="020B0400000000000000" pitchFamily="50" charset="-128"/>
+                <a:ea typeface="BIZ UDPゴシック" panose="020B0400000000000000" pitchFamily="50" charset="-128"/>
+              </a:rPr>
+              <a:t>つのボタンで構成</a:t>
+            </a:r>
+            <a:endParaRPr kumimoji="1" lang="en-US" altLang="ja-JP" sz="2400" dirty="0">
+              <a:latin typeface="BIZ UDPゴシック" panose="020B0400000000000000" pitchFamily="50" charset="-128"/>
+              <a:ea typeface="BIZ UDPゴシック" panose="020B0400000000000000" pitchFamily="50" charset="-128"/>
+            </a:endParaRPr>
+          </a:p>
+          <a:p>
+            <a:r>
+              <a:rPr lang="ja-JP" altLang="en-US" sz="2400" dirty="0">
+                <a:latin typeface="BIZ UDPゴシック" panose="020B0400000000000000" pitchFamily="50" charset="-128"/>
+                <a:ea typeface="BIZ UDPゴシック" panose="020B0400000000000000" pitchFamily="50" charset="-128"/>
+              </a:rPr>
+              <a:t>①ゲーム開始</a:t>
+            </a:r>
+            <a:endParaRPr lang="en-US" altLang="ja-JP" sz="2400" dirty="0">
+              <a:latin typeface="BIZ UDPゴシック" panose="020B0400000000000000" pitchFamily="50" charset="-128"/>
+              <a:ea typeface="BIZ UDPゴシック" panose="020B0400000000000000" pitchFamily="50" charset="-128"/>
+            </a:endParaRPr>
+          </a:p>
+          <a:p>
+            <a:r>
+              <a:rPr lang="ja-JP" altLang="en-US" sz="2400" dirty="0">
+                <a:latin typeface="BIZ UDPゴシック" panose="020B0400000000000000" pitchFamily="50" charset="-128"/>
+                <a:ea typeface="BIZ UDPゴシック" panose="020B0400000000000000" pitchFamily="50" charset="-128"/>
+              </a:rPr>
+              <a:t>②</a:t>
+            </a:r>
+            <a:r>
+              <a:rPr kumimoji="1" lang="ja-JP" altLang="en-US" sz="2400" dirty="0">
+                <a:latin typeface="BIZ UDPゴシック" panose="020B0400000000000000" pitchFamily="50" charset="-128"/>
+                <a:ea typeface="BIZ UDPゴシック" panose="020B0400000000000000" pitchFamily="50" charset="-128"/>
+              </a:rPr>
+              <a:t>オプション</a:t>
+            </a:r>
+            <a:endParaRPr kumimoji="1" lang="en-US" altLang="ja-JP" sz="2400" dirty="0">
+              <a:latin typeface="BIZ UDPゴシック" panose="020B0400000000000000" pitchFamily="50" charset="-128"/>
+              <a:ea typeface="BIZ UDPゴシック" panose="020B0400000000000000" pitchFamily="50" charset="-128"/>
+            </a:endParaRPr>
+          </a:p>
+          <a:p>
+            <a:r>
+              <a:rPr lang="ja-JP" altLang="en-US" sz="2400" dirty="0">
+                <a:latin typeface="BIZ UDPゴシック" panose="020B0400000000000000" pitchFamily="50" charset="-128"/>
+                <a:ea typeface="BIZ UDPゴシック" panose="020B0400000000000000" pitchFamily="50" charset="-128"/>
+              </a:rPr>
+              <a:t>③ゲーム終了</a:t>
+            </a:r>
+            <a:endParaRPr lang="en-US" altLang="ja-JP" sz="2400" dirty="0">
+              <a:latin typeface="BIZ UDPゴシック" panose="020B0400000000000000" pitchFamily="50" charset="-128"/>
+              <a:ea typeface="BIZ UDPゴシック" panose="020B0400000000000000" pitchFamily="50" charset="-128"/>
+            </a:endParaRPr>
+          </a:p>
+          <a:p>
+            <a:endParaRPr lang="en-US" altLang="ja-JP" sz="2400" dirty="0">
+              <a:latin typeface="BIZ UDPゴシック" panose="020B0400000000000000" pitchFamily="50" charset="-128"/>
+              <a:ea typeface="BIZ UDPゴシック" panose="020B0400000000000000" pitchFamily="50" charset="-128"/>
+            </a:endParaRPr>
+          </a:p>
+          <a:p>
+            <a:r>
+              <a:rPr kumimoji="1" lang="ja-JP" altLang="en-US" sz="2400" dirty="0">
+                <a:latin typeface="BIZ UDPゴシック" panose="020B0400000000000000" pitchFamily="50" charset="-128"/>
+                <a:ea typeface="BIZ UDPゴシック" panose="020B0400000000000000" pitchFamily="50" charset="-128"/>
+              </a:rPr>
+              <a:t>★「</a:t>
+            </a:r>
+            <a:r>
+              <a:rPr kumimoji="1" lang="en-US" altLang="ja-JP" sz="2400" dirty="0">
+                <a:latin typeface="BIZ UDPゴシック" panose="020B0400000000000000" pitchFamily="50" charset="-128"/>
+                <a:ea typeface="BIZ UDPゴシック" panose="020B0400000000000000" pitchFamily="50" charset="-128"/>
+              </a:rPr>
+              <a:t>Enter</a:t>
+            </a:r>
+            <a:r>
+              <a:rPr kumimoji="1" lang="ja-JP" altLang="en-US" sz="2400" dirty="0">
+                <a:latin typeface="BIZ UDPゴシック" panose="020B0400000000000000" pitchFamily="50" charset="-128"/>
+                <a:ea typeface="BIZ UDPゴシック" panose="020B0400000000000000" pitchFamily="50" charset="-128"/>
+              </a:rPr>
+              <a:t>」でもゲームを開始できる</a:t>
+            </a:r>
+          </a:p>
+        </p:txBody>
+      </p:sp>
+      <p:pic>
+        <p:nvPicPr>
+          <p:cNvPr id="5" name="図 4">
+            <a:extLst>
+              <a:ext uri="{FF2B5EF4-FFF2-40B4-BE49-F238E27FC236}">
+                <a16:creationId xmlns:a16="http://schemas.microsoft.com/office/drawing/2014/main" id="{0DA940A6-D348-D221-A18F-DFA7438EDD6B}"/>
+              </a:ext>
+            </a:extLst>
+          </p:cNvPr>
+          <p:cNvPicPr>
+            <a:picLocks noChangeAspect="1"/>
+          </p:cNvPicPr>
           <p:nvPr/>
-        </p:nvSpPr>
+        </p:nvPicPr>
+        <p:blipFill>
+          <a:blip r:embed="rId2"/>
+          <a:stretch>
+            <a:fillRect/>
+          </a:stretch>
+        </p:blipFill>
         <p:spPr>
           <a:xfrm>
-            <a:off x="2320309" y="1914525"/>
-            <a:ext cx="7551381" cy="2400300"/>
+            <a:off x="783695" y="1433163"/>
+            <a:ext cx="5002321" cy="4516265"/>
           </a:xfrm>
           <a:prstGeom prst="rect">
             <a:avLst/>
           </a:prstGeom>
-          <a:solidFill>
+        </p:spPr>
+      </p:pic>
+    </p:spTree>
+    <p:extLst>
+      <p:ext uri="{BB962C8B-B14F-4D97-AF65-F5344CB8AC3E}">
+        <p14:creationId xmlns:p14="http://schemas.microsoft.com/office/powerpoint/2010/main" val="3491099242"/>
+      </p:ext>
+    </p:extLst>
+  </p:cSld>
+  <p:clrMapOvr>
+    <a:masterClrMapping/>
+  </p:clrMapOvr>
+</p:sld>
+</file>
+
+<file path=ppt/slides/slide3.xml><?xml version="1.0" encoding="utf-8"?>
+<p:sld xmlns:a="http://schemas.openxmlformats.org/drawingml/2006/main" xmlns:r="http://schemas.openxmlformats.org/officeDocument/2006/relationships" xmlns:p="http://schemas.openxmlformats.org/presentationml/2006/main">
+  <p:cSld>
+    <p:bg>
+      <p:bgPr>
+        <a:pattFill prst="lgGrid">
+          <a:fgClr>
+            <a:schemeClr val="bg1">
+              <a:lumMod val="85000"/>
+            </a:schemeClr>
+          </a:fgClr>
+          <a:bgClr>
             <a:schemeClr val="bg1"/>
-          </a:solidFill>
-          <a:ln>
+          </a:bgClr>
+        </a:pattFill>
+        <a:effectLst/>
+      </p:bgPr>
+    </p:bg>
+    <p:spTree>
+      <p:nvGrpSpPr>
+        <p:cNvPr id="1" name=""/>
+        <p:cNvGrpSpPr/>
+        <p:nvPr/>
+      </p:nvGrpSpPr>
+      <p:grpSpPr>
+        <a:xfrm>
+          <a:off x="0" y="0"/>
+          <a:ext cx="0" cy="0"/>
+          <a:chOff x="0" y="0"/>
+          <a:chExt cx="0" cy="0"/>
+        </a:xfrm>
+      </p:grpSpPr>
+      <p:cxnSp>
+        <p:nvCxnSpPr>
+          <p:cNvPr id="3" name="直線コネクタ 2">
+            <a:extLst>
+              <a:ext uri="{FF2B5EF4-FFF2-40B4-BE49-F238E27FC236}">
+                <a16:creationId xmlns:a16="http://schemas.microsoft.com/office/drawing/2014/main" id="{5DC24858-B6DA-3594-99D9-171D897CE944}"/>
+              </a:ext>
+            </a:extLst>
+          </p:cNvPr>
+          <p:cNvCxnSpPr>
+            <a:cxnSpLocks/>
+          </p:cNvCxnSpPr>
+          <p:nvPr/>
+        </p:nvCxnSpPr>
+        <p:spPr>
+          <a:xfrm>
+            <a:off x="386585" y="1089791"/>
+            <a:ext cx="2898271" cy="0"/>
+          </a:xfrm>
+          <a:prstGeom prst="line">
+            <a:avLst/>
+          </a:prstGeom>
+          <a:ln w="107950">
             <a:solidFill>
-              <a:schemeClr val="tx1"/>
+              <a:srgbClr val="0C807E"/>
             </a:solidFill>
           </a:ln>
         </p:spPr>
         <p:style>
-          <a:lnRef idx="2">
-            <a:schemeClr val="accent1">
-              <a:shade val="15000"/>
-            </a:schemeClr>
+          <a:lnRef idx="1">
+            <a:schemeClr val="accent1"/>
           </a:lnRef>
-          <a:fillRef idx="1">
+          <a:fillRef idx="0">
             <a:schemeClr val="accent1"/>
           </a:fillRef>
           <a:effectRef idx="0">
             <a:schemeClr val="accent1"/>
           </a:effectRef>
           <a:fontRef idx="minor">
-            <a:schemeClr val="lt1"/>
+            <a:schemeClr val="tx1"/>
           </a:fontRef>
         </p:style>
-        <p:txBody>
-          <a:bodyPr rtlCol="0" anchor="ctr"/>
+      </p:cxnSp>
+      <p:sp>
+        <p:nvSpPr>
+          <p:cNvPr id="4" name="テキスト ボックス 3">
+            <a:extLst>
+              <a:ext uri="{FF2B5EF4-FFF2-40B4-BE49-F238E27FC236}">
+                <a16:creationId xmlns:a16="http://schemas.microsoft.com/office/drawing/2014/main" id="{53C81E2E-813F-643F-A4C6-2A801E7736F0}"/>
+              </a:ext>
+            </a:extLst>
+          </p:cNvPr>
+          <p:cNvSpPr txBox="1"/>
+          <p:nvPr/>
+        </p:nvSpPr>
+        <p:spPr>
+          <a:xfrm>
+            <a:off x="405635" y="284792"/>
+            <a:ext cx="3440365" cy="707886"/>
+          </a:xfrm>
+          <a:prstGeom prst="rect">
+            <a:avLst/>
+          </a:prstGeom>
+          <a:noFill/>
+        </p:spPr>
+        <p:txBody>
+          <a:bodyPr wrap="none" rtlCol="0">
+            <a:spAutoFit/>
+          </a:bodyPr>
           <a:lstStyle/>
           <a:p>
-            <a:pPr algn="ctr"/>
-            <a:r>
-              <a:rPr kumimoji="1" lang="ja-JP" altLang="en-US" dirty="0">
+            <a:r>
+              <a:rPr lang="ja-JP" altLang="en-US" sz="4000" dirty="0">
                 <a:solidFill>
-                  <a:sysClr val="windowText" lastClr="000000"/>
+                  <a:schemeClr val="accent3">
+                    <a:lumMod val="50000"/>
+                  </a:schemeClr>
                 </a:solidFill>
-              </a:rPr>
-              <a:t>画面の写真とか</a:t>
-            </a:r>
-          </a:p>
-        </p:txBody>
-      </p:sp>
+                <a:latin typeface="HGPｺﾞｼｯｸE" panose="020B0900000000000000" pitchFamily="50" charset="-128"/>
+                <a:ea typeface="HGPｺﾞｼｯｸE" panose="020B0900000000000000" pitchFamily="50" charset="-128"/>
+              </a:rPr>
+              <a:t>オプション画面</a:t>
+            </a:r>
+            <a:endParaRPr kumimoji="1" lang="ja-JP" altLang="en-US" sz="4000" dirty="0">
+              <a:solidFill>
+                <a:schemeClr val="accent3">
+                  <a:lumMod val="50000"/>
+                </a:schemeClr>
+              </a:solidFill>
+              <a:latin typeface="HGPｺﾞｼｯｸE" panose="020B0900000000000000" pitchFamily="50" charset="-128"/>
+              <a:ea typeface="HGPｺﾞｼｯｸE" panose="020B0900000000000000" pitchFamily="50" charset="-128"/>
+            </a:endParaRPr>
+          </a:p>
+        </p:txBody>
+      </p:sp>
+      <p:sp>
+        <p:nvSpPr>
+          <p:cNvPr id="6" name="テキスト ボックス 5">
+            <a:extLst>
+              <a:ext uri="{FF2B5EF4-FFF2-40B4-BE49-F238E27FC236}">
+                <a16:creationId xmlns:a16="http://schemas.microsoft.com/office/drawing/2014/main" id="{1D032682-6069-7B2F-E5BA-AFFE2ACFFFB5}"/>
+              </a:ext>
+            </a:extLst>
+          </p:cNvPr>
+          <p:cNvSpPr txBox="1"/>
+          <p:nvPr/>
+        </p:nvSpPr>
+        <p:spPr>
+          <a:xfrm>
+            <a:off x="6017342" y="2497394"/>
+            <a:ext cx="6035627" cy="2800767"/>
+          </a:xfrm>
+          <a:prstGeom prst="rect">
+            <a:avLst/>
+          </a:prstGeom>
+          <a:noFill/>
+        </p:spPr>
+        <p:txBody>
+          <a:bodyPr wrap="none" rtlCol="0">
+            <a:spAutoFit/>
+          </a:bodyPr>
+          <a:lstStyle/>
+          <a:p>
+            <a:r>
+              <a:rPr lang="ja-JP" altLang="en-US" sz="2400" dirty="0">
+                <a:latin typeface="BIZ UDPゴシック" panose="020B0400000000000000" pitchFamily="50" charset="-128"/>
+                <a:ea typeface="BIZ UDPゴシック" panose="020B0400000000000000" pitchFamily="50" charset="-128"/>
+              </a:rPr>
+              <a:t>オプション画面は以下の</a:t>
+            </a:r>
+            <a:r>
+              <a:rPr lang="en-US" altLang="ja-JP" sz="2400" dirty="0">
+                <a:latin typeface="BIZ UDPゴシック" panose="020B0400000000000000" pitchFamily="50" charset="-128"/>
+                <a:ea typeface="BIZ UDPゴシック" panose="020B0400000000000000" pitchFamily="50" charset="-128"/>
+              </a:rPr>
+              <a:t>3</a:t>
+            </a:r>
+            <a:r>
+              <a:rPr lang="ja-JP" altLang="en-US" sz="2400" dirty="0">
+                <a:latin typeface="BIZ UDPゴシック" panose="020B0400000000000000" pitchFamily="50" charset="-128"/>
+                <a:ea typeface="BIZ UDPゴシック" panose="020B0400000000000000" pitchFamily="50" charset="-128"/>
+              </a:rPr>
+              <a:t>つのボタンで構成</a:t>
+            </a:r>
+            <a:endParaRPr lang="en-US" altLang="ja-JP" sz="2400" dirty="0">
+              <a:latin typeface="BIZ UDPゴシック" panose="020B0400000000000000" pitchFamily="50" charset="-128"/>
+              <a:ea typeface="BIZ UDPゴシック" panose="020B0400000000000000" pitchFamily="50" charset="-128"/>
+            </a:endParaRPr>
+          </a:p>
+          <a:p>
+            <a:r>
+              <a:rPr kumimoji="1" lang="ja-JP" altLang="en-US" sz="2400" dirty="0">
+                <a:latin typeface="BIZ UDPゴシック" panose="020B0400000000000000" pitchFamily="50" charset="-128"/>
+                <a:ea typeface="BIZ UDPゴシック" panose="020B0400000000000000" pitchFamily="50" charset="-128"/>
+              </a:rPr>
+              <a:t>①操作説明</a:t>
+            </a:r>
+            <a:endParaRPr kumimoji="1" lang="en-US" altLang="ja-JP" sz="2400" dirty="0">
+              <a:latin typeface="BIZ UDPゴシック" panose="020B0400000000000000" pitchFamily="50" charset="-128"/>
+              <a:ea typeface="BIZ UDPゴシック" panose="020B0400000000000000" pitchFamily="50" charset="-128"/>
+            </a:endParaRPr>
+          </a:p>
+          <a:p>
+            <a:r>
+              <a:rPr kumimoji="1" lang="ja-JP" altLang="en-US" sz="2000" dirty="0">
+                <a:latin typeface="BIZ UDPゴシック" panose="020B0400000000000000" pitchFamily="50" charset="-128"/>
+                <a:ea typeface="BIZ UDPゴシック" panose="020B0400000000000000" pitchFamily="50" charset="-128"/>
+              </a:rPr>
+              <a:t>操作方法の説明を表示している。</a:t>
+            </a:r>
+            <a:endParaRPr kumimoji="1" lang="en-US" altLang="ja-JP" sz="2000" dirty="0">
+              <a:latin typeface="BIZ UDPゴシック" panose="020B0400000000000000" pitchFamily="50" charset="-128"/>
+              <a:ea typeface="BIZ UDPゴシック" panose="020B0400000000000000" pitchFamily="50" charset="-128"/>
+            </a:endParaRPr>
+          </a:p>
+          <a:p>
+            <a:r>
+              <a:rPr kumimoji="1" lang="ja-JP" altLang="en-US" sz="2400" dirty="0">
+                <a:latin typeface="BIZ UDPゴシック" panose="020B0400000000000000" pitchFamily="50" charset="-128"/>
+                <a:ea typeface="BIZ UDPゴシック" panose="020B0400000000000000" pitchFamily="50" charset="-128"/>
+              </a:rPr>
+              <a:t>②ゲーム説明</a:t>
+            </a:r>
+            <a:endParaRPr kumimoji="1" lang="en-US" altLang="ja-JP" sz="2400" dirty="0">
+              <a:latin typeface="BIZ UDPゴシック" panose="020B0400000000000000" pitchFamily="50" charset="-128"/>
+              <a:ea typeface="BIZ UDPゴシック" panose="020B0400000000000000" pitchFamily="50" charset="-128"/>
+            </a:endParaRPr>
+          </a:p>
+          <a:p>
+            <a:r>
+              <a:rPr lang="en-US" altLang="ja-JP" sz="2000" dirty="0">
+                <a:latin typeface="BIZ UDPゴシック" panose="020B0400000000000000" pitchFamily="50" charset="-128"/>
+                <a:ea typeface="BIZ UDPゴシック" panose="020B0400000000000000" pitchFamily="50" charset="-128"/>
+              </a:rPr>
+              <a:t>NOMAL</a:t>
+            </a:r>
+            <a:r>
+              <a:rPr lang="ja-JP" altLang="en-US" sz="2000" dirty="0">
+                <a:latin typeface="BIZ UDPゴシック" panose="020B0400000000000000" pitchFamily="50" charset="-128"/>
+                <a:ea typeface="BIZ UDPゴシック" panose="020B0400000000000000" pitchFamily="50" charset="-128"/>
+              </a:rPr>
+              <a:t>、</a:t>
+            </a:r>
+            <a:r>
+              <a:rPr lang="en-US" altLang="ja-JP" sz="2000" dirty="0">
+                <a:latin typeface="BIZ UDPゴシック" panose="020B0400000000000000" pitchFamily="50" charset="-128"/>
+                <a:ea typeface="BIZ UDPゴシック" panose="020B0400000000000000" pitchFamily="50" charset="-128"/>
+              </a:rPr>
+              <a:t>HARD</a:t>
+            </a:r>
+            <a:r>
+              <a:rPr lang="ja-JP" altLang="en-US" sz="2000" dirty="0">
+                <a:latin typeface="BIZ UDPゴシック" panose="020B0400000000000000" pitchFamily="50" charset="-128"/>
+                <a:ea typeface="BIZ UDPゴシック" panose="020B0400000000000000" pitchFamily="50" charset="-128"/>
+              </a:rPr>
+              <a:t>モードのゲーム説明</a:t>
+            </a:r>
+            <a:endParaRPr lang="en-US" altLang="ja-JP" sz="2000" dirty="0">
+              <a:latin typeface="BIZ UDPゴシック" panose="020B0400000000000000" pitchFamily="50" charset="-128"/>
+              <a:ea typeface="BIZ UDPゴシック" panose="020B0400000000000000" pitchFamily="50" charset="-128"/>
+            </a:endParaRPr>
+          </a:p>
+          <a:p>
+            <a:r>
+              <a:rPr kumimoji="1" lang="ja-JP" altLang="en-US" sz="2000" dirty="0">
+                <a:latin typeface="BIZ UDPゴシック" panose="020B0400000000000000" pitchFamily="50" charset="-128"/>
+                <a:ea typeface="BIZ UDPゴシック" panose="020B0400000000000000" pitchFamily="50" charset="-128"/>
+              </a:rPr>
+              <a:t>それぞれ</a:t>
+            </a:r>
+            <a:r>
+              <a:rPr lang="ja-JP" altLang="en-US" sz="2000" dirty="0">
+                <a:latin typeface="BIZ UDPゴシック" panose="020B0400000000000000" pitchFamily="50" charset="-128"/>
+                <a:ea typeface="BIZ UDPゴシック" panose="020B0400000000000000" pitchFamily="50" charset="-128"/>
+              </a:rPr>
+              <a:t>書いている</a:t>
+            </a:r>
+            <a:endParaRPr kumimoji="1" lang="en-US" altLang="ja-JP" sz="2400" dirty="0">
+              <a:latin typeface="BIZ UDPゴシック" panose="020B0400000000000000" pitchFamily="50" charset="-128"/>
+              <a:ea typeface="BIZ UDPゴシック" panose="020B0400000000000000" pitchFamily="50" charset="-128"/>
+            </a:endParaRPr>
+          </a:p>
+          <a:p>
+            <a:r>
+              <a:rPr kumimoji="1" lang="ja-JP" altLang="en-US" sz="2400" dirty="0">
+                <a:latin typeface="BIZ UDPゴシック" panose="020B0400000000000000" pitchFamily="50" charset="-128"/>
+                <a:ea typeface="BIZ UDPゴシック" panose="020B0400000000000000" pitchFamily="50" charset="-128"/>
+              </a:rPr>
+              <a:t>③タイトルへ戻る</a:t>
+            </a:r>
+            <a:endParaRPr kumimoji="1" lang="en-US" altLang="ja-JP" sz="2400" dirty="0">
+              <a:latin typeface="BIZ UDPゴシック" panose="020B0400000000000000" pitchFamily="50" charset="-128"/>
+              <a:ea typeface="BIZ UDPゴシック" panose="020B0400000000000000" pitchFamily="50" charset="-128"/>
+            </a:endParaRPr>
+          </a:p>
+          <a:p>
+            <a:r>
+              <a:rPr kumimoji="1" lang="ja-JP" altLang="en-US" sz="2000" dirty="0">
+                <a:latin typeface="BIZ UDPゴシック" panose="020B0400000000000000" pitchFamily="50" charset="-128"/>
+                <a:ea typeface="BIZ UDPゴシック" panose="020B0400000000000000" pitchFamily="50" charset="-128"/>
+              </a:rPr>
+              <a:t>難易度：「</a:t>
+            </a:r>
+            <a:r>
+              <a:rPr kumimoji="1" lang="en-US" altLang="ja-JP" sz="2000" dirty="0">
+                <a:solidFill>
+                  <a:srgbClr val="0070C0"/>
+                </a:solidFill>
+                <a:latin typeface="BIZ UDPゴシック" panose="020B0400000000000000" pitchFamily="50" charset="-128"/>
+                <a:ea typeface="BIZ UDPゴシック" panose="020B0400000000000000" pitchFamily="50" charset="-128"/>
+              </a:rPr>
+              <a:t>NOMAL</a:t>
+            </a:r>
+            <a:r>
+              <a:rPr kumimoji="1" lang="ja-JP" altLang="en-US" sz="2000" dirty="0">
+                <a:latin typeface="BIZ UDPゴシック" panose="020B0400000000000000" pitchFamily="50" charset="-128"/>
+                <a:ea typeface="BIZ UDPゴシック" panose="020B0400000000000000" pitchFamily="50" charset="-128"/>
+              </a:rPr>
+              <a:t>か「</a:t>
+            </a:r>
+            <a:r>
+              <a:rPr kumimoji="1" lang="en-US" altLang="ja-JP" sz="2000" dirty="0">
+                <a:solidFill>
+                  <a:srgbClr val="FF00FF"/>
+                </a:solidFill>
+                <a:latin typeface="BIZ UDPゴシック" panose="020B0400000000000000" pitchFamily="50" charset="-128"/>
+                <a:ea typeface="BIZ UDPゴシック" panose="020B0400000000000000" pitchFamily="50" charset="-128"/>
+              </a:rPr>
+              <a:t>HARD</a:t>
+            </a:r>
+            <a:r>
+              <a:rPr kumimoji="1" lang="ja-JP" altLang="en-US" sz="2000" dirty="0">
+                <a:latin typeface="BIZ UDPゴシック" panose="020B0400000000000000" pitchFamily="50" charset="-128"/>
+                <a:ea typeface="BIZ UDPゴシック" panose="020B0400000000000000" pitchFamily="50" charset="-128"/>
+              </a:rPr>
+              <a:t>」を選択できる</a:t>
+            </a:r>
+          </a:p>
+        </p:txBody>
+      </p:sp>
+      <p:pic>
+        <p:nvPicPr>
+          <p:cNvPr id="9" name="図 8">
+            <a:extLst>
+              <a:ext uri="{FF2B5EF4-FFF2-40B4-BE49-F238E27FC236}">
+                <a16:creationId xmlns:a16="http://schemas.microsoft.com/office/drawing/2014/main" id="{D84BC9B6-0E46-BA33-BDD0-F961118AB583}"/>
+              </a:ext>
+            </a:extLst>
+          </p:cNvPr>
+          <p:cNvPicPr>
+            <a:picLocks noChangeAspect="1"/>
+          </p:cNvPicPr>
+          <p:nvPr/>
+        </p:nvPicPr>
+        <p:blipFill>
+          <a:blip r:embed="rId2"/>
+          <a:stretch>
+            <a:fillRect/>
+          </a:stretch>
+        </p:blipFill>
+        <p:spPr>
+          <a:xfrm>
+            <a:off x="652056" y="1473892"/>
+            <a:ext cx="5050654" cy="4566485"/>
+          </a:xfrm>
+          <a:prstGeom prst="rect">
+            <a:avLst/>
+          </a:prstGeom>
+        </p:spPr>
+      </p:pic>
+      <p:pic>
+        <p:nvPicPr>
+          <p:cNvPr id="11" name="図 10">
+            <a:extLst>
+              <a:ext uri="{FF2B5EF4-FFF2-40B4-BE49-F238E27FC236}">
+                <a16:creationId xmlns:a16="http://schemas.microsoft.com/office/drawing/2014/main" id="{30888332-12C1-6AD1-F9FD-B939D0A113A3}"/>
+              </a:ext>
+            </a:extLst>
+          </p:cNvPr>
+          <p:cNvPicPr>
+            <a:picLocks noChangeAspect="1"/>
+          </p:cNvPicPr>
+          <p:nvPr/>
+        </p:nvPicPr>
+        <p:blipFill>
+          <a:blip r:embed="rId3"/>
+          <a:stretch>
+            <a:fillRect/>
+          </a:stretch>
+        </p:blipFill>
+        <p:spPr>
+          <a:xfrm>
+            <a:off x="6096000" y="972633"/>
+            <a:ext cx="2146161" cy="443865"/>
+          </a:xfrm>
+          <a:prstGeom prst="rect">
+            <a:avLst/>
+          </a:prstGeom>
+        </p:spPr>
+      </p:pic>
+      <p:cxnSp>
+        <p:nvCxnSpPr>
+          <p:cNvPr id="17" name="直線矢印コネクタ 16">
+            <a:extLst>
+              <a:ext uri="{FF2B5EF4-FFF2-40B4-BE49-F238E27FC236}">
+                <a16:creationId xmlns:a16="http://schemas.microsoft.com/office/drawing/2014/main" id="{D2B11A59-BD72-4154-60BA-4E3BB2C03F82}"/>
+              </a:ext>
+            </a:extLst>
+          </p:cNvPr>
+          <p:cNvCxnSpPr>
+            <a:cxnSpLocks/>
+          </p:cNvCxnSpPr>
+          <p:nvPr/>
+        </p:nvCxnSpPr>
+        <p:spPr>
+          <a:xfrm flipH="1">
+            <a:off x="4233228" y="1416498"/>
+            <a:ext cx="1784114" cy="1080896"/>
+          </a:xfrm>
+          <a:prstGeom prst="straightConnector1">
+            <a:avLst/>
+          </a:prstGeom>
+          <a:ln>
+            <a:solidFill>
+              <a:srgbClr val="FFFF00"/>
+            </a:solidFill>
+            <a:tailEnd type="triangle"/>
+          </a:ln>
+        </p:spPr>
+        <p:style>
+          <a:lnRef idx="2">
+            <a:schemeClr val="accent1"/>
+          </a:lnRef>
+          <a:fillRef idx="0">
+            <a:schemeClr val="accent1"/>
+          </a:fillRef>
+          <a:effectRef idx="1">
+            <a:schemeClr val="accent1"/>
+          </a:effectRef>
+          <a:fontRef idx="minor">
+            <a:schemeClr val="tx1"/>
+          </a:fontRef>
+        </p:style>
+      </p:cxnSp>
     </p:spTree>
     <p:extLst>
       <p:ext uri="{BB962C8B-B14F-4D97-AF65-F5344CB8AC3E}">
         <p14:creationId xmlns:p14="http://schemas.microsoft.com/office/powerpoint/2010/main" val="3106124702"/>
+      </p:ext>
+    </p:extLst>
+  </p:cSld>
+  <p:clrMapOvr>
+    <a:masterClrMapping/>
+  </p:clrMapOvr>
+</p:sld>
+</file>
+
+<file path=ppt/slides/slide4.xml><?xml version="1.0" encoding="utf-8"?>
+<p:sld xmlns:a="http://schemas.openxmlformats.org/drawingml/2006/main" xmlns:r="http://schemas.openxmlformats.org/officeDocument/2006/relationships" xmlns:p="http://schemas.openxmlformats.org/presentationml/2006/main">
+  <p:cSld>
+    <p:bg>
+      <p:bgPr>
+        <a:pattFill prst="lgGrid">
+          <a:fgClr>
+            <a:schemeClr val="bg1">
+              <a:lumMod val="85000"/>
+            </a:schemeClr>
+          </a:fgClr>
+          <a:bgClr>
+            <a:schemeClr val="bg1"/>
+          </a:bgClr>
+        </a:pattFill>
+        <a:effectLst/>
+      </p:bgPr>
+    </p:bg>
+    <p:spTree>
+      <p:nvGrpSpPr>
+        <p:cNvPr id="1" name="">
+          <a:extLst>
+            <a:ext uri="{FF2B5EF4-FFF2-40B4-BE49-F238E27FC236}">
+              <a16:creationId xmlns:a16="http://schemas.microsoft.com/office/drawing/2014/main" id="{D04790FA-3998-D8F5-3FDC-D035E2C29390}"/>
+            </a:ext>
+          </a:extLst>
+        </p:cNvPr>
+        <p:cNvGrpSpPr/>
+        <p:nvPr/>
+      </p:nvGrpSpPr>
+      <p:grpSpPr>
+        <a:xfrm>
+          <a:off x="0" y="0"/>
+          <a:ext cx="0" cy="0"/>
+          <a:chOff x="0" y="0"/>
+          <a:chExt cx="0" cy="0"/>
+        </a:xfrm>
+      </p:grpSpPr>
+      <p:cxnSp>
+        <p:nvCxnSpPr>
+          <p:cNvPr id="3" name="直線コネクタ 2">
+            <a:extLst>
+              <a:ext uri="{FF2B5EF4-FFF2-40B4-BE49-F238E27FC236}">
+                <a16:creationId xmlns:a16="http://schemas.microsoft.com/office/drawing/2014/main" id="{0E547CCF-7CDA-CF28-E8AC-375705B31D8A}"/>
+              </a:ext>
+            </a:extLst>
+          </p:cNvPr>
+          <p:cNvCxnSpPr>
+            <a:cxnSpLocks/>
+          </p:cNvCxnSpPr>
+          <p:nvPr/>
+        </p:nvCxnSpPr>
+        <p:spPr>
+          <a:xfrm>
+            <a:off x="386585" y="1089791"/>
+            <a:ext cx="2898271" cy="0"/>
+          </a:xfrm>
+          <a:prstGeom prst="line">
+            <a:avLst/>
+          </a:prstGeom>
+          <a:ln w="107950">
+            <a:solidFill>
+              <a:srgbClr val="0C807E"/>
+            </a:solidFill>
+          </a:ln>
+        </p:spPr>
+        <p:style>
+          <a:lnRef idx="1">
+            <a:schemeClr val="accent1"/>
+          </a:lnRef>
+          <a:fillRef idx="0">
+            <a:schemeClr val="accent1"/>
+          </a:fillRef>
+          <a:effectRef idx="0">
+            <a:schemeClr val="accent1"/>
+          </a:effectRef>
+          <a:fontRef idx="minor">
+            <a:schemeClr val="tx1"/>
+          </a:fontRef>
+        </p:style>
+      </p:cxnSp>
+      <p:sp>
+        <p:nvSpPr>
+          <p:cNvPr id="4" name="テキスト ボックス 3">
+            <a:extLst>
+              <a:ext uri="{FF2B5EF4-FFF2-40B4-BE49-F238E27FC236}">
+                <a16:creationId xmlns:a16="http://schemas.microsoft.com/office/drawing/2014/main" id="{8469E831-C139-177B-105F-D94164F40CEF}"/>
+              </a:ext>
+            </a:extLst>
+          </p:cNvPr>
+          <p:cNvSpPr txBox="1"/>
+          <p:nvPr/>
+        </p:nvSpPr>
+        <p:spPr>
+          <a:xfrm>
+            <a:off x="405635" y="284792"/>
+            <a:ext cx="3725700" cy="707886"/>
+          </a:xfrm>
+          <a:prstGeom prst="rect">
+            <a:avLst/>
+          </a:prstGeom>
+          <a:noFill/>
+        </p:spPr>
+        <p:txBody>
+          <a:bodyPr wrap="none" rtlCol="0">
+            <a:spAutoFit/>
+          </a:bodyPr>
+          <a:lstStyle/>
+          <a:p>
+            <a:r>
+              <a:rPr kumimoji="1" lang="ja-JP" altLang="en-US" sz="4000" dirty="0">
+                <a:solidFill>
+                  <a:schemeClr val="accent3">
+                    <a:lumMod val="50000"/>
+                  </a:schemeClr>
+                </a:solidFill>
+                <a:latin typeface="HGPｺﾞｼｯｸE" panose="020B0900000000000000" pitchFamily="50" charset="-128"/>
+                <a:ea typeface="HGPｺﾞｼｯｸE" panose="020B0900000000000000" pitchFamily="50" charset="-128"/>
+              </a:rPr>
+              <a:t>ゲーム説明画面</a:t>
+            </a:r>
+          </a:p>
+        </p:txBody>
+      </p:sp>
+      <p:sp>
+        <p:nvSpPr>
+          <p:cNvPr id="12" name="テキスト ボックス 11">
+            <a:extLst>
+              <a:ext uri="{FF2B5EF4-FFF2-40B4-BE49-F238E27FC236}">
+                <a16:creationId xmlns:a16="http://schemas.microsoft.com/office/drawing/2014/main" id="{552DBFD8-0005-18A6-8E4C-C658004CA86C}"/>
+              </a:ext>
+            </a:extLst>
+          </p:cNvPr>
+          <p:cNvSpPr txBox="1"/>
+          <p:nvPr/>
+        </p:nvSpPr>
+        <p:spPr>
+          <a:xfrm>
+            <a:off x="969892" y="1487725"/>
+            <a:ext cx="2597186" cy="369332"/>
+          </a:xfrm>
+          <a:prstGeom prst="rect">
+            <a:avLst/>
+          </a:prstGeom>
+          <a:noFill/>
+        </p:spPr>
+        <p:txBody>
+          <a:bodyPr wrap="none" rtlCol="0">
+            <a:spAutoFit/>
+          </a:bodyPr>
+          <a:lstStyle/>
+          <a:p>
+            <a:r>
+              <a:rPr kumimoji="1" lang="en-US" altLang="ja-JP" dirty="0"/>
+              <a:t>1.NOMAL</a:t>
+            </a:r>
+            <a:r>
+              <a:rPr kumimoji="1" lang="ja-JP" altLang="en-US" dirty="0"/>
+              <a:t>モードの説明</a:t>
+            </a:r>
+          </a:p>
+        </p:txBody>
+      </p:sp>
+      <p:sp>
+        <p:nvSpPr>
+          <p:cNvPr id="14" name="テキスト ボックス 13">
+            <a:extLst>
+              <a:ext uri="{FF2B5EF4-FFF2-40B4-BE49-F238E27FC236}">
+                <a16:creationId xmlns:a16="http://schemas.microsoft.com/office/drawing/2014/main" id="{68E1CD58-568C-5FB5-27F9-FF844E2CCEA6}"/>
+              </a:ext>
+            </a:extLst>
+          </p:cNvPr>
+          <p:cNvSpPr txBox="1"/>
+          <p:nvPr/>
+        </p:nvSpPr>
+        <p:spPr>
+          <a:xfrm>
+            <a:off x="6389001" y="1487725"/>
+            <a:ext cx="2403222" cy="369332"/>
+          </a:xfrm>
+          <a:prstGeom prst="rect">
+            <a:avLst/>
+          </a:prstGeom>
+          <a:noFill/>
+        </p:spPr>
+        <p:txBody>
+          <a:bodyPr wrap="none" rtlCol="0">
+            <a:spAutoFit/>
+          </a:bodyPr>
+          <a:lstStyle/>
+          <a:p>
+            <a:r>
+              <a:rPr lang="en-US" altLang="ja-JP" dirty="0"/>
+              <a:t>2</a:t>
+            </a:r>
+            <a:r>
+              <a:rPr kumimoji="1" lang="en-US" altLang="ja-JP" dirty="0"/>
+              <a:t>.</a:t>
+            </a:r>
+            <a:r>
+              <a:rPr lang="en-US" altLang="ja-JP" dirty="0"/>
+              <a:t>HARD</a:t>
+            </a:r>
+            <a:r>
+              <a:rPr kumimoji="1" lang="ja-JP" altLang="en-US" dirty="0"/>
+              <a:t>モードの説明</a:t>
+            </a:r>
+          </a:p>
+        </p:txBody>
+      </p:sp>
+      <p:pic>
+        <p:nvPicPr>
+          <p:cNvPr id="5" name="図 4">
+            <a:extLst>
+              <a:ext uri="{FF2B5EF4-FFF2-40B4-BE49-F238E27FC236}">
+                <a16:creationId xmlns:a16="http://schemas.microsoft.com/office/drawing/2014/main" id="{2DA5D1F8-E5AB-580E-0E66-1A0C5226006D}"/>
+              </a:ext>
+            </a:extLst>
+          </p:cNvPr>
+          <p:cNvPicPr>
+            <a:picLocks noChangeAspect="1"/>
+          </p:cNvPicPr>
+          <p:nvPr/>
+        </p:nvPicPr>
+        <p:blipFill>
+          <a:blip r:embed="rId2"/>
+          <a:stretch>
+            <a:fillRect/>
+          </a:stretch>
+        </p:blipFill>
+        <p:spPr>
+          <a:xfrm>
+            <a:off x="882429" y="1981528"/>
+            <a:ext cx="4593348" cy="4084005"/>
+          </a:xfrm>
+          <a:prstGeom prst="rect">
+            <a:avLst/>
+          </a:prstGeom>
+        </p:spPr>
+      </p:pic>
+      <p:pic>
+        <p:nvPicPr>
+          <p:cNvPr id="7" name="図 6">
+            <a:extLst>
+              <a:ext uri="{FF2B5EF4-FFF2-40B4-BE49-F238E27FC236}">
+                <a16:creationId xmlns:a16="http://schemas.microsoft.com/office/drawing/2014/main" id="{787EBA48-5CBC-582B-761E-B606A0FC9D3C}"/>
+              </a:ext>
+            </a:extLst>
+          </p:cNvPr>
+          <p:cNvPicPr>
+            <a:picLocks noChangeAspect="1"/>
+          </p:cNvPicPr>
+          <p:nvPr/>
+        </p:nvPicPr>
+        <p:blipFill>
+          <a:blip r:embed="rId3"/>
+          <a:stretch>
+            <a:fillRect/>
+          </a:stretch>
+        </p:blipFill>
+        <p:spPr>
+          <a:xfrm>
+            <a:off x="6532742" y="1981527"/>
+            <a:ext cx="4518962" cy="4084006"/>
+          </a:xfrm>
+          <a:prstGeom prst="rect">
+            <a:avLst/>
+          </a:prstGeom>
+        </p:spPr>
+      </p:pic>
+    </p:spTree>
+    <p:extLst>
+      <p:ext uri="{BB962C8B-B14F-4D97-AF65-F5344CB8AC3E}">
+        <p14:creationId xmlns:p14="http://schemas.microsoft.com/office/powerpoint/2010/main" val="4195209715"/>
+      </p:ext>
+    </p:extLst>
+  </p:cSld>
+  <p:clrMapOvr>
+    <a:masterClrMapping/>
+  </p:clrMapOvr>
+</p:sld>
+</file>
+
+<file path=ppt/slides/slide5.xml><?xml version="1.0" encoding="utf-8"?>
+<p:sld xmlns:a="http://schemas.openxmlformats.org/drawingml/2006/main" xmlns:r="http://schemas.openxmlformats.org/officeDocument/2006/relationships" xmlns:p="http://schemas.openxmlformats.org/presentationml/2006/main">
+  <p:cSld>
+    <p:bg>
+      <p:bgPr>
+        <a:pattFill prst="lgGrid">
+          <a:fgClr>
+            <a:schemeClr val="bg1">
+              <a:lumMod val="85000"/>
+            </a:schemeClr>
+          </a:fgClr>
+          <a:bgClr>
+            <a:schemeClr val="bg1"/>
+          </a:bgClr>
+        </a:pattFill>
+        <a:effectLst/>
+      </p:bgPr>
+    </p:bg>
+    <p:spTree>
+      <p:nvGrpSpPr>
+        <p:cNvPr id="1" name="">
+          <a:extLst>
+            <a:ext uri="{FF2B5EF4-FFF2-40B4-BE49-F238E27FC236}">
+              <a16:creationId xmlns:a16="http://schemas.microsoft.com/office/drawing/2014/main" id="{1F0FEB8B-3EC3-8ECE-4EED-6D03E845DB6E}"/>
+            </a:ext>
+          </a:extLst>
+        </p:cNvPr>
+        <p:cNvGrpSpPr/>
+        <p:nvPr/>
+      </p:nvGrpSpPr>
+      <p:grpSpPr>
+        <a:xfrm>
+          <a:off x="0" y="0"/>
+          <a:ext cx="0" cy="0"/>
+          <a:chOff x="0" y="0"/>
+          <a:chExt cx="0" cy="0"/>
+        </a:xfrm>
+      </p:grpSpPr>
+      <p:cxnSp>
+        <p:nvCxnSpPr>
+          <p:cNvPr id="3" name="直線コネクタ 2">
+            <a:extLst>
+              <a:ext uri="{FF2B5EF4-FFF2-40B4-BE49-F238E27FC236}">
+                <a16:creationId xmlns:a16="http://schemas.microsoft.com/office/drawing/2014/main" id="{7CC72FCF-D3B4-13DB-2F77-4340AC576117}"/>
+              </a:ext>
+            </a:extLst>
+          </p:cNvPr>
+          <p:cNvCxnSpPr>
+            <a:cxnSpLocks/>
+          </p:cNvCxnSpPr>
+          <p:nvPr/>
+        </p:nvCxnSpPr>
+        <p:spPr>
+          <a:xfrm>
+            <a:off x="386585" y="1089791"/>
+            <a:ext cx="2898271" cy="0"/>
+          </a:xfrm>
+          <a:prstGeom prst="line">
+            <a:avLst/>
+          </a:prstGeom>
+          <a:ln w="107950">
+            <a:solidFill>
+              <a:srgbClr val="0C807E"/>
+            </a:solidFill>
+          </a:ln>
+        </p:spPr>
+        <p:style>
+          <a:lnRef idx="1">
+            <a:schemeClr val="accent1"/>
+          </a:lnRef>
+          <a:fillRef idx="0">
+            <a:schemeClr val="accent1"/>
+          </a:fillRef>
+          <a:effectRef idx="0">
+            <a:schemeClr val="accent1"/>
+          </a:effectRef>
+          <a:fontRef idx="minor">
+            <a:schemeClr val="tx1"/>
+          </a:fontRef>
+        </p:style>
+      </p:cxnSp>
+      <p:sp>
+        <p:nvSpPr>
+          <p:cNvPr id="4" name="テキスト ボックス 3">
+            <a:extLst>
+              <a:ext uri="{FF2B5EF4-FFF2-40B4-BE49-F238E27FC236}">
+                <a16:creationId xmlns:a16="http://schemas.microsoft.com/office/drawing/2014/main" id="{F4F53D4C-31C0-3555-FC70-F88F4019F57A}"/>
+              </a:ext>
+            </a:extLst>
+          </p:cNvPr>
+          <p:cNvSpPr txBox="1"/>
+          <p:nvPr/>
+        </p:nvSpPr>
+        <p:spPr>
+          <a:xfrm>
+            <a:off x="405635" y="284792"/>
+            <a:ext cx="3595856" cy="707886"/>
+          </a:xfrm>
+          <a:prstGeom prst="rect">
+            <a:avLst/>
+          </a:prstGeom>
+          <a:noFill/>
+        </p:spPr>
+        <p:txBody>
+          <a:bodyPr wrap="none" rtlCol="0">
+            <a:spAutoFit/>
+          </a:bodyPr>
+          <a:lstStyle/>
+          <a:p>
+            <a:r>
+              <a:rPr kumimoji="1" lang="ja-JP" altLang="en-US" sz="4000" dirty="0">
+                <a:solidFill>
+                  <a:schemeClr val="accent3">
+                    <a:lumMod val="50000"/>
+                  </a:schemeClr>
+                </a:solidFill>
+                <a:latin typeface="HGPｺﾞｼｯｸE" panose="020B0900000000000000" pitchFamily="50" charset="-128"/>
+                <a:ea typeface="HGPｺﾞｼｯｸE" panose="020B0900000000000000" pitchFamily="50" charset="-128"/>
+              </a:rPr>
+              <a:t>スコア加算方法</a:t>
+            </a:r>
+            <a:endParaRPr kumimoji="1" lang="en-US" altLang="ja-JP" sz="4000" dirty="0">
+              <a:solidFill>
+                <a:schemeClr val="accent3">
+                  <a:lumMod val="50000"/>
+                </a:schemeClr>
+              </a:solidFill>
+              <a:latin typeface="HGPｺﾞｼｯｸE" panose="020B0900000000000000" pitchFamily="50" charset="-128"/>
+              <a:ea typeface="HGPｺﾞｼｯｸE" panose="020B0900000000000000" pitchFamily="50" charset="-128"/>
+            </a:endParaRPr>
+          </a:p>
+        </p:txBody>
+      </p:sp>
+      <p:sp>
+        <p:nvSpPr>
+          <p:cNvPr id="6" name="テキスト ボックス 5">
+            <a:extLst>
+              <a:ext uri="{FF2B5EF4-FFF2-40B4-BE49-F238E27FC236}">
+                <a16:creationId xmlns:a16="http://schemas.microsoft.com/office/drawing/2014/main" id="{E96FEB7E-C844-C8CD-C904-43E847709DB3}"/>
+              </a:ext>
+            </a:extLst>
+          </p:cNvPr>
+          <p:cNvSpPr txBox="1"/>
+          <p:nvPr/>
+        </p:nvSpPr>
+        <p:spPr>
+          <a:xfrm>
+            <a:off x="1408601" y="1605424"/>
+            <a:ext cx="184731" cy="830997"/>
+          </a:xfrm>
+          <a:prstGeom prst="rect">
+            <a:avLst/>
+          </a:prstGeom>
+          <a:noFill/>
+        </p:spPr>
+        <p:txBody>
+          <a:bodyPr wrap="none" rtlCol="0">
+            <a:spAutoFit/>
+          </a:bodyPr>
+          <a:lstStyle/>
+          <a:p>
+            <a:endParaRPr lang="en-US" altLang="ja-JP" sz="2400" dirty="0">
+              <a:latin typeface="BIZ UDPゴシック" panose="020B0400000000000000" pitchFamily="50" charset="-128"/>
+              <a:ea typeface="BIZ UDPゴシック" panose="020B0400000000000000" pitchFamily="50" charset="-128"/>
+            </a:endParaRPr>
+          </a:p>
+          <a:p>
+            <a:endParaRPr kumimoji="1" lang="ja-JP" altLang="en-US" sz="2400" dirty="0">
+              <a:latin typeface="BIZ UDPゴシック" panose="020B0400000000000000" pitchFamily="50" charset="-128"/>
+              <a:ea typeface="BIZ UDPゴシック" panose="020B0400000000000000" pitchFamily="50" charset="-128"/>
+            </a:endParaRPr>
+          </a:p>
+        </p:txBody>
+      </p:sp>
+      <p:sp>
+        <p:nvSpPr>
+          <p:cNvPr id="5" name="テキスト ボックス 4">
+            <a:extLst>
+              <a:ext uri="{FF2B5EF4-FFF2-40B4-BE49-F238E27FC236}">
+                <a16:creationId xmlns:a16="http://schemas.microsoft.com/office/drawing/2014/main" id="{BAA7D06A-EA45-F9CF-5FC5-89A7DCB70E87}"/>
+              </a:ext>
+            </a:extLst>
+          </p:cNvPr>
+          <p:cNvSpPr txBox="1"/>
+          <p:nvPr/>
+        </p:nvSpPr>
+        <p:spPr>
+          <a:xfrm>
+            <a:off x="717377" y="1379479"/>
+            <a:ext cx="11330244" cy="4455066"/>
+          </a:xfrm>
+          <a:prstGeom prst="rect">
+            <a:avLst/>
+          </a:prstGeom>
+          <a:noFill/>
+        </p:spPr>
+        <p:txBody>
+          <a:bodyPr wrap="square">
+            <a:spAutoFit/>
+          </a:bodyPr>
+          <a:lstStyle/>
+          <a:p>
+            <a:pPr marL="0" marR="0" indent="0" algn="l">
+              <a:spcAft>
+                <a:spcPts val="900"/>
+              </a:spcAft>
+              <a:buNone/>
+            </a:pPr>
+            <a:r>
+              <a:rPr lang="ja-JP" altLang="ja-JP" sz="2800" b="1" i="0" dirty="0">
+                <a:effectLst/>
+                <a:latin typeface="BIZ UDPゴシック" panose="020B0400000000000000" pitchFamily="50" charset="-128"/>
+                <a:ea typeface="BIZ UDPゴシック" panose="020B0400000000000000" pitchFamily="50" charset="-128"/>
+              </a:rPr>
+              <a:t>タイムボーナス リアルタイム計算</a:t>
+            </a:r>
+          </a:p>
+          <a:p>
+            <a:pPr marL="0" marR="0" indent="0" algn="l">
+              <a:spcBef>
+                <a:spcPts val="1500"/>
+              </a:spcBef>
+              <a:spcAft>
+                <a:spcPts val="1200"/>
+              </a:spcAft>
+            </a:pPr>
+            <a:r>
+              <a:rPr lang="ja-JP" altLang="en-US" sz="2400" b="1" i="0" dirty="0">
+                <a:effectLst/>
+                <a:latin typeface="BIZ UDPゴシック" panose="020B0400000000000000" pitchFamily="50" charset="-128"/>
+                <a:ea typeface="BIZ UDPゴシック" panose="020B0400000000000000" pitchFamily="50" charset="-128"/>
+              </a:rPr>
+              <a:t>・</a:t>
+            </a:r>
+            <a:r>
+              <a:rPr lang="ja-JP" altLang="ja-JP" sz="2400" b="1" i="0" dirty="0">
+                <a:effectLst/>
+                <a:latin typeface="BIZ UDPゴシック" panose="020B0400000000000000" pitchFamily="50" charset="-128"/>
+                <a:ea typeface="BIZ UDPゴシック" panose="020B0400000000000000" pitchFamily="50" charset="-128"/>
+              </a:rPr>
+              <a:t>1秒につき +10点 </a:t>
+            </a:r>
+            <a:br>
+              <a:rPr lang="ja-JP" altLang="ja-JP" sz="2400" b="0" i="0" dirty="0">
+                <a:effectLst/>
+                <a:latin typeface="BIZ UDPゴシック" panose="020B0400000000000000" pitchFamily="50" charset="-128"/>
+                <a:ea typeface="BIZ UDPゴシック" panose="020B0400000000000000" pitchFamily="50" charset="-128"/>
+              </a:rPr>
+            </a:br>
+            <a:r>
+              <a:rPr lang="ja-JP" altLang="ja-JP" sz="2400" b="0" i="0" dirty="0">
+                <a:effectLst/>
+                <a:latin typeface="BIZ UDPゴシック" panose="020B0400000000000000" pitchFamily="50" charset="-128"/>
+                <a:ea typeface="BIZ UDPゴシック" panose="020B0400000000000000" pitchFamily="50" charset="-128"/>
+              </a:rPr>
+              <a:t>残り時間をリアルタイムでスコア換算</a:t>
+            </a:r>
+          </a:p>
+          <a:p>
+            <a:pPr marL="0" marR="0" indent="0" algn="l">
+              <a:spcBef>
+                <a:spcPts val="1500"/>
+              </a:spcBef>
+              <a:spcAft>
+                <a:spcPts val="1200"/>
+              </a:spcAft>
+              <a:buFont typeface="Arial" panose="020B0604020202020204" pitchFamily="34" charset="0"/>
+              <a:buChar char="•"/>
+            </a:pPr>
+            <a:r>
+              <a:rPr lang="ja-JP" altLang="ja-JP" sz="2400" b="1" i="0" dirty="0">
+                <a:effectLst/>
+                <a:latin typeface="BIZ UDPゴシック" panose="020B0400000000000000" pitchFamily="50" charset="-128"/>
+                <a:ea typeface="BIZ UDPゴシック" panose="020B0400000000000000" pitchFamily="50" charset="-128"/>
+              </a:rPr>
+              <a:t>宝獲得ボーナス（1個 +</a:t>
+            </a:r>
+            <a:r>
+              <a:rPr lang="en-US" altLang="ja-JP" sz="2400" b="1" i="0" dirty="0">
+                <a:effectLst/>
+                <a:latin typeface="BIZ UDPゴシック" panose="020B0400000000000000" pitchFamily="50" charset="-128"/>
+                <a:ea typeface="BIZ UDPゴシック" panose="020B0400000000000000" pitchFamily="50" charset="-128"/>
+              </a:rPr>
+              <a:t>3</a:t>
+            </a:r>
+            <a:r>
+              <a:rPr lang="ja-JP" altLang="ja-JP" sz="2400" b="1" i="0" dirty="0">
+                <a:effectLst/>
+                <a:latin typeface="BIZ UDPゴシック" panose="020B0400000000000000" pitchFamily="50" charset="-128"/>
+                <a:ea typeface="BIZ UDPゴシック" panose="020B0400000000000000" pitchFamily="50" charset="-128"/>
+              </a:rPr>
+              <a:t>00点</a:t>
+            </a:r>
+            <a:r>
+              <a:rPr lang="ja-JP" altLang="en-US" sz="2400" b="1" dirty="0">
+                <a:latin typeface="BIZ UDPゴシック" panose="020B0400000000000000" pitchFamily="50" charset="-128"/>
+                <a:ea typeface="BIZ UDPゴシック" panose="020B0400000000000000" pitchFamily="50" charset="-128"/>
+              </a:rPr>
+              <a:t> </a:t>
+            </a:r>
+            <a:r>
+              <a:rPr lang="ja-JP" altLang="ja-JP" sz="2400" b="1" i="0" dirty="0">
+                <a:effectLst/>
+                <a:latin typeface="BIZ UDPゴシック" panose="020B0400000000000000" pitchFamily="50" charset="-128"/>
+                <a:ea typeface="BIZ UDPゴシック" panose="020B0400000000000000" pitchFamily="50" charset="-128"/>
+              </a:rPr>
+              <a:t>）</a:t>
+            </a:r>
+            <a:br>
+              <a:rPr lang="ja-JP" altLang="ja-JP" sz="2400" b="0" i="0" dirty="0">
+                <a:effectLst/>
+                <a:latin typeface="BIZ UDPゴシック" panose="020B0400000000000000" pitchFamily="50" charset="-128"/>
+                <a:ea typeface="BIZ UDPゴシック" panose="020B0400000000000000" pitchFamily="50" charset="-128"/>
+              </a:rPr>
+            </a:br>
+            <a:r>
+              <a:rPr lang="ja-JP" altLang="ja-JP" sz="2400" b="0" i="0" dirty="0">
+                <a:effectLst/>
+                <a:latin typeface="BIZ UDPゴシック" panose="020B0400000000000000" pitchFamily="50" charset="-128"/>
+                <a:ea typeface="BIZ UDPゴシック" panose="020B0400000000000000" pitchFamily="50" charset="-128"/>
+              </a:rPr>
+              <a:t>宝の取得と同時にメッセージUIへ取得通知を発行。</a:t>
+            </a:r>
+          </a:p>
+          <a:p>
+            <a:pPr marL="0" marR="0" indent="0" algn="l">
+              <a:spcBef>
+                <a:spcPts val="1500"/>
+              </a:spcBef>
+              <a:spcAft>
+                <a:spcPts val="1200"/>
+              </a:spcAft>
+              <a:buFont typeface="Arial" panose="020B0604020202020204" pitchFamily="34" charset="0"/>
+              <a:buChar char="•"/>
+            </a:pPr>
+            <a:r>
+              <a:rPr lang="ja-JP" altLang="en-US" sz="2400" b="1" dirty="0">
+                <a:latin typeface="BIZ UDPゴシック" panose="020B0400000000000000" pitchFamily="50" charset="-128"/>
+                <a:ea typeface="BIZ UDPゴシック" panose="020B0400000000000000" pitchFamily="50" charset="-128"/>
+              </a:rPr>
+              <a:t>マグマに入った場合</a:t>
+            </a:r>
+            <a:br>
+              <a:rPr lang="ja-JP" altLang="ja-JP" sz="2400" b="0" i="0" dirty="0">
+                <a:effectLst/>
+                <a:latin typeface="BIZ UDPゴシック" panose="020B0400000000000000" pitchFamily="50" charset="-128"/>
+                <a:ea typeface="BIZ UDPゴシック" panose="020B0400000000000000" pitchFamily="50" charset="-128"/>
+              </a:rPr>
+            </a:br>
+            <a:r>
+              <a:rPr lang="ja-JP" altLang="ja-JP" sz="2400" b="0" i="0" dirty="0">
+                <a:effectLst/>
+                <a:latin typeface="BIZ UDPゴシック" panose="020B0400000000000000" pitchFamily="50" charset="-128"/>
+                <a:ea typeface="BIZ UDPゴシック" panose="020B0400000000000000" pitchFamily="50" charset="-128"/>
+              </a:rPr>
+              <a:t>マグマ</a:t>
+            </a:r>
+            <a:r>
+              <a:rPr lang="ja-JP" altLang="en-US" sz="2400" b="0" i="0" dirty="0">
+                <a:effectLst/>
+                <a:latin typeface="BIZ UDPゴシック" panose="020B0400000000000000" pitchFamily="50" charset="-128"/>
+                <a:ea typeface="BIZ UDPゴシック" panose="020B0400000000000000" pitchFamily="50" charset="-128"/>
+              </a:rPr>
+              <a:t>に入った場合</a:t>
+            </a:r>
+            <a:r>
+              <a:rPr lang="en-US" altLang="ja-JP" sz="2400" b="0" i="0" dirty="0">
+                <a:effectLst/>
+                <a:latin typeface="BIZ UDPゴシック" panose="020B0400000000000000" pitchFamily="50" charset="-128"/>
+                <a:ea typeface="BIZ UDPゴシック" panose="020B0400000000000000" pitchFamily="50" charset="-128"/>
+              </a:rPr>
+              <a:t>0.5</a:t>
+            </a:r>
+            <a:r>
+              <a:rPr lang="ja-JP" altLang="en-US" sz="2400" b="0" i="0" dirty="0">
+                <a:effectLst/>
+                <a:latin typeface="BIZ UDPゴシック" panose="020B0400000000000000" pitchFamily="50" charset="-128"/>
+                <a:ea typeface="BIZ UDPゴシック" panose="020B0400000000000000" pitchFamily="50" charset="-128"/>
+              </a:rPr>
+              <a:t>秒ごとに</a:t>
+            </a:r>
+            <a:r>
+              <a:rPr lang="en-US" altLang="ja-JP" sz="2400" b="0" i="0" dirty="0">
+                <a:effectLst/>
+                <a:latin typeface="BIZ UDPゴシック" panose="020B0400000000000000" pitchFamily="50" charset="-128"/>
+                <a:ea typeface="BIZ UDPゴシック" panose="020B0400000000000000" pitchFamily="50" charset="-128"/>
+              </a:rPr>
+              <a:t>-10</a:t>
+            </a:r>
+            <a:r>
+              <a:rPr lang="ja-JP" altLang="en-US" sz="2400" b="0" i="0" dirty="0">
+                <a:effectLst/>
+                <a:latin typeface="BIZ UDPゴシック" panose="020B0400000000000000" pitchFamily="50" charset="-128"/>
+                <a:ea typeface="BIZ UDPゴシック" panose="020B0400000000000000" pitchFamily="50" charset="-128"/>
+              </a:rPr>
+              <a:t>点（注意：</a:t>
+            </a:r>
+            <a:r>
+              <a:rPr lang="en-US" altLang="ja-JP" sz="2400" b="0" i="0" dirty="0">
+                <a:effectLst/>
+                <a:latin typeface="BIZ UDPゴシック" panose="020B0400000000000000" pitchFamily="50" charset="-128"/>
+                <a:ea typeface="BIZ UDPゴシック" panose="020B0400000000000000" pitchFamily="50" charset="-128"/>
+              </a:rPr>
+              <a:t>2</a:t>
+            </a:r>
+            <a:r>
+              <a:rPr lang="ja-JP" altLang="en-US" sz="2400" dirty="0">
+                <a:latin typeface="BIZ UDPゴシック" panose="020B0400000000000000" pitchFamily="50" charset="-128"/>
+                <a:ea typeface="BIZ UDPゴシック" panose="020B0400000000000000" pitchFamily="50" charset="-128"/>
+              </a:rPr>
+              <a:t>秒以上触れるとゲームオーバー）</a:t>
+            </a:r>
+            <a:endParaRPr lang="en-US" altLang="ja-JP" sz="2400" b="0" i="0" dirty="0">
+              <a:effectLst/>
+              <a:latin typeface="BIZ UDPゴシック" panose="020B0400000000000000" pitchFamily="50" charset="-128"/>
+              <a:ea typeface="BIZ UDPゴシック" panose="020B0400000000000000" pitchFamily="50" charset="-128"/>
+            </a:endParaRPr>
+          </a:p>
+          <a:p>
+            <a:pPr marL="0" marR="0" indent="0" algn="l">
+              <a:spcBef>
+                <a:spcPts val="1500"/>
+              </a:spcBef>
+              <a:spcAft>
+                <a:spcPts val="1200"/>
+              </a:spcAft>
+              <a:buFont typeface="Arial" panose="020B0604020202020204" pitchFamily="34" charset="0"/>
+              <a:buChar char="•"/>
+            </a:pPr>
+            <a:r>
+              <a:rPr lang="ja-JP" altLang="en-US" sz="2400" b="1" i="0" dirty="0">
+                <a:effectLst/>
+                <a:latin typeface="BIZ UDPゴシック" panose="020B0400000000000000" pitchFamily="50" charset="-128"/>
+                <a:ea typeface="BIZ UDPゴシック" panose="020B0400000000000000" pitchFamily="50" charset="-128"/>
+              </a:rPr>
+              <a:t>ゲームクリアで＋</a:t>
+            </a:r>
+            <a:r>
+              <a:rPr lang="en-US" altLang="ja-JP" sz="2400" b="1" dirty="0">
+                <a:latin typeface="BIZ UDPゴシック" panose="020B0400000000000000" pitchFamily="50" charset="-128"/>
+                <a:ea typeface="BIZ UDPゴシック" panose="020B0400000000000000" pitchFamily="50" charset="-128"/>
+              </a:rPr>
+              <a:t>10</a:t>
+            </a:r>
+            <a:r>
+              <a:rPr lang="en-US" altLang="ja-JP" sz="2400" b="1" i="0" dirty="0">
+                <a:effectLst/>
+                <a:latin typeface="BIZ UDPゴシック" panose="020B0400000000000000" pitchFamily="50" charset="-128"/>
+                <a:ea typeface="BIZ UDPゴシック" panose="020B0400000000000000" pitchFamily="50" charset="-128"/>
+              </a:rPr>
+              <a:t>00</a:t>
+            </a:r>
+            <a:r>
+              <a:rPr lang="ja-JP" altLang="en-US" sz="2400" b="1" i="0" dirty="0">
+                <a:effectLst/>
+                <a:latin typeface="BIZ UDPゴシック" panose="020B0400000000000000" pitchFamily="50" charset="-128"/>
+                <a:ea typeface="BIZ UDPゴシック" panose="020B0400000000000000" pitchFamily="50" charset="-128"/>
+              </a:rPr>
+              <a:t>点</a:t>
+            </a:r>
+            <a:endParaRPr lang="ja-JP" altLang="ja-JP" sz="2400" b="1" i="0" dirty="0">
+              <a:effectLst/>
+              <a:latin typeface="BIZ UDPゴシック" panose="020B0400000000000000" pitchFamily="50" charset="-128"/>
+              <a:ea typeface="BIZ UDPゴシック" panose="020B0400000000000000" pitchFamily="50" charset="-128"/>
+            </a:endParaRPr>
+          </a:p>
+        </p:txBody>
+      </p:sp>
+    </p:spTree>
+    <p:extLst>
+      <p:ext uri="{BB962C8B-B14F-4D97-AF65-F5344CB8AC3E}">
+        <p14:creationId xmlns:p14="http://schemas.microsoft.com/office/powerpoint/2010/main" val="2171945861"/>
+      </p:ext>
+    </p:extLst>
+  </p:cSld>
+  <p:clrMapOvr>
+    <a:masterClrMapping/>
+  </p:clrMapOvr>
+</p:sld>
+</file>
+
+<file path=ppt/slides/slide6.xml><?xml version="1.0" encoding="utf-8"?>
+<p:sld xmlns:a="http://schemas.openxmlformats.org/drawingml/2006/main" xmlns:r="http://schemas.openxmlformats.org/officeDocument/2006/relationships" xmlns:p="http://schemas.openxmlformats.org/presentationml/2006/main">
+  <p:cSld>
+    <p:bg>
+      <p:bgPr>
+        <a:pattFill prst="lgGrid">
+          <a:fgClr>
+            <a:schemeClr val="bg1">
+              <a:lumMod val="85000"/>
+            </a:schemeClr>
+          </a:fgClr>
+          <a:bgClr>
+            <a:schemeClr val="bg1"/>
+          </a:bgClr>
+        </a:pattFill>
+        <a:effectLst/>
+      </p:bgPr>
+    </p:bg>
+    <p:spTree>
+      <p:nvGrpSpPr>
+        <p:cNvPr id="1" name="">
+          <a:extLst>
+            <a:ext uri="{FF2B5EF4-FFF2-40B4-BE49-F238E27FC236}">
+              <a16:creationId xmlns:a16="http://schemas.microsoft.com/office/drawing/2014/main" id="{6BD82ADC-07D6-31D1-7DDE-542A4BD23FF3}"/>
+            </a:ext>
+          </a:extLst>
+        </p:cNvPr>
+        <p:cNvGrpSpPr/>
+        <p:nvPr/>
+      </p:nvGrpSpPr>
+      <p:grpSpPr>
+        <a:xfrm>
+          <a:off x="0" y="0"/>
+          <a:ext cx="0" cy="0"/>
+          <a:chOff x="0" y="0"/>
+          <a:chExt cx="0" cy="0"/>
+        </a:xfrm>
+      </p:grpSpPr>
+      <p:cxnSp>
+        <p:nvCxnSpPr>
+          <p:cNvPr id="3" name="直線コネクタ 2">
+            <a:extLst>
+              <a:ext uri="{FF2B5EF4-FFF2-40B4-BE49-F238E27FC236}">
+                <a16:creationId xmlns:a16="http://schemas.microsoft.com/office/drawing/2014/main" id="{18ECC6CE-BF68-6654-09BF-02F31ECBA4CF}"/>
+              </a:ext>
+            </a:extLst>
+          </p:cNvPr>
+          <p:cNvCxnSpPr>
+            <a:cxnSpLocks/>
+          </p:cNvCxnSpPr>
+          <p:nvPr/>
+        </p:nvCxnSpPr>
+        <p:spPr>
+          <a:xfrm>
+            <a:off x="386585" y="1089791"/>
+            <a:ext cx="2898271" cy="0"/>
+          </a:xfrm>
+          <a:prstGeom prst="line">
+            <a:avLst/>
+          </a:prstGeom>
+          <a:ln w="107950">
+            <a:solidFill>
+              <a:srgbClr val="0C807E"/>
+            </a:solidFill>
+          </a:ln>
+        </p:spPr>
+        <p:style>
+          <a:lnRef idx="1">
+            <a:schemeClr val="accent1"/>
+          </a:lnRef>
+          <a:fillRef idx="0">
+            <a:schemeClr val="accent1"/>
+          </a:fillRef>
+          <a:effectRef idx="0">
+            <a:schemeClr val="accent1"/>
+          </a:effectRef>
+          <a:fontRef idx="minor">
+            <a:schemeClr val="tx1"/>
+          </a:fontRef>
+        </p:style>
+      </p:cxnSp>
+      <p:sp>
+        <p:nvSpPr>
+          <p:cNvPr id="4" name="テキスト ボックス 3">
+            <a:extLst>
+              <a:ext uri="{FF2B5EF4-FFF2-40B4-BE49-F238E27FC236}">
+                <a16:creationId xmlns:a16="http://schemas.microsoft.com/office/drawing/2014/main" id="{4157E850-9A3B-B099-1B8A-FA5A78E6DCBD}"/>
+              </a:ext>
+            </a:extLst>
+          </p:cNvPr>
+          <p:cNvSpPr txBox="1"/>
+          <p:nvPr/>
+        </p:nvSpPr>
+        <p:spPr>
+          <a:xfrm>
+            <a:off x="405635" y="284792"/>
+            <a:ext cx="184731" cy="707886"/>
+          </a:xfrm>
+          <a:prstGeom prst="rect">
+            <a:avLst/>
+          </a:prstGeom>
+          <a:noFill/>
+        </p:spPr>
+        <p:txBody>
+          <a:bodyPr wrap="none" rtlCol="0">
+            <a:spAutoFit/>
+          </a:bodyPr>
+          <a:lstStyle/>
+          <a:p>
+            <a:endParaRPr kumimoji="1" lang="ja-JP" altLang="en-US" sz="4000" dirty="0">
+              <a:solidFill>
+                <a:schemeClr val="accent3">
+                  <a:lumMod val="50000"/>
+                </a:schemeClr>
+              </a:solidFill>
+              <a:latin typeface="HGPｺﾞｼｯｸE" panose="020B0900000000000000" pitchFamily="50" charset="-128"/>
+              <a:ea typeface="HGPｺﾞｼｯｸE" panose="020B0900000000000000" pitchFamily="50" charset="-128"/>
+            </a:endParaRPr>
+          </a:p>
+        </p:txBody>
+      </p:sp>
+      <p:pic>
+        <p:nvPicPr>
+          <p:cNvPr id="8" name="図 7">
+            <a:extLst>
+              <a:ext uri="{FF2B5EF4-FFF2-40B4-BE49-F238E27FC236}">
+                <a16:creationId xmlns:a16="http://schemas.microsoft.com/office/drawing/2014/main" id="{045E576B-0405-E283-5CCB-C483EA065636}"/>
+              </a:ext>
+            </a:extLst>
+          </p:cNvPr>
+          <p:cNvPicPr>
+            <a:picLocks noChangeAspect="1"/>
+          </p:cNvPicPr>
+          <p:nvPr/>
+        </p:nvPicPr>
+        <p:blipFill>
+          <a:blip r:embed="rId2"/>
+          <a:stretch>
+            <a:fillRect/>
+          </a:stretch>
+        </p:blipFill>
+        <p:spPr>
+          <a:xfrm>
+            <a:off x="498000" y="1526715"/>
+            <a:ext cx="5287225" cy="4754239"/>
+          </a:xfrm>
+          <a:prstGeom prst="rect">
+            <a:avLst/>
+          </a:prstGeom>
+        </p:spPr>
+      </p:pic>
+      <p:sp>
+        <p:nvSpPr>
+          <p:cNvPr id="10" name="テキスト ボックス 9">
+            <a:extLst>
+              <a:ext uri="{FF2B5EF4-FFF2-40B4-BE49-F238E27FC236}">
+                <a16:creationId xmlns:a16="http://schemas.microsoft.com/office/drawing/2014/main" id="{D42C2198-CBE5-B240-4124-D8CBCDDB71D8}"/>
+              </a:ext>
+            </a:extLst>
+          </p:cNvPr>
+          <p:cNvSpPr txBox="1"/>
+          <p:nvPr/>
+        </p:nvSpPr>
+        <p:spPr>
+          <a:xfrm>
+            <a:off x="405635" y="284792"/>
+            <a:ext cx="7229864" cy="707886"/>
+          </a:xfrm>
+          <a:prstGeom prst="rect">
+            <a:avLst/>
+          </a:prstGeom>
+          <a:noFill/>
+        </p:spPr>
+        <p:txBody>
+          <a:bodyPr wrap="none" rtlCol="0">
+            <a:spAutoFit/>
+          </a:bodyPr>
+          <a:lstStyle/>
+          <a:p>
+            <a:r>
+              <a:rPr lang="ja-JP" altLang="en-US" sz="4000" dirty="0">
+                <a:solidFill>
+                  <a:schemeClr val="accent3">
+                    <a:lumMod val="50000"/>
+                  </a:schemeClr>
+                </a:solidFill>
+                <a:latin typeface="HGPｺﾞｼｯｸE" panose="020B0900000000000000" pitchFamily="50" charset="-128"/>
+                <a:ea typeface="HGPｺﾞｼｯｸE" panose="020B0900000000000000" pitchFamily="50" charset="-128"/>
+              </a:rPr>
+              <a:t>ゲーム画面</a:t>
+            </a:r>
+            <a:r>
+              <a:rPr lang="en-US" altLang="ja-JP" sz="4000" dirty="0">
+                <a:solidFill>
+                  <a:schemeClr val="accent3">
+                    <a:lumMod val="50000"/>
+                  </a:schemeClr>
+                </a:solidFill>
+                <a:latin typeface="HGPｺﾞｼｯｸE" panose="020B0900000000000000" pitchFamily="50" charset="-128"/>
+                <a:ea typeface="HGPｺﾞｼｯｸE" panose="020B0900000000000000" pitchFamily="50" charset="-128"/>
+              </a:rPr>
+              <a:t>(NOMAL)UI</a:t>
+            </a:r>
+            <a:r>
+              <a:rPr lang="ja-JP" altLang="en-US" sz="4000" dirty="0">
+                <a:solidFill>
+                  <a:schemeClr val="accent3">
+                    <a:lumMod val="50000"/>
+                  </a:schemeClr>
+                </a:solidFill>
+                <a:latin typeface="HGPｺﾞｼｯｸE" panose="020B0900000000000000" pitchFamily="50" charset="-128"/>
+                <a:ea typeface="HGPｺﾞｼｯｸE" panose="020B0900000000000000" pitchFamily="50" charset="-128"/>
+              </a:rPr>
+              <a:t>レイアウト</a:t>
+            </a:r>
+            <a:endParaRPr kumimoji="1" lang="en-US" altLang="ja-JP" sz="4000" dirty="0">
+              <a:solidFill>
+                <a:schemeClr val="accent3">
+                  <a:lumMod val="50000"/>
+                </a:schemeClr>
+              </a:solidFill>
+              <a:latin typeface="HGPｺﾞｼｯｸE" panose="020B0900000000000000" pitchFamily="50" charset="-128"/>
+              <a:ea typeface="HGPｺﾞｼｯｸE" panose="020B0900000000000000" pitchFamily="50" charset="-128"/>
+            </a:endParaRPr>
+          </a:p>
+        </p:txBody>
+      </p:sp>
+      <p:sp>
+        <p:nvSpPr>
+          <p:cNvPr id="2" name="テキスト ボックス 1">
+            <a:extLst>
+              <a:ext uri="{FF2B5EF4-FFF2-40B4-BE49-F238E27FC236}">
+                <a16:creationId xmlns:a16="http://schemas.microsoft.com/office/drawing/2014/main" id="{983415A0-6009-8D06-5CE2-216DABAEF79E}"/>
+              </a:ext>
+            </a:extLst>
+          </p:cNvPr>
+          <p:cNvSpPr txBox="1"/>
+          <p:nvPr/>
+        </p:nvSpPr>
+        <p:spPr>
+          <a:xfrm>
+            <a:off x="6096000" y="1089791"/>
+            <a:ext cx="5202065" cy="4093428"/>
+          </a:xfrm>
+          <a:prstGeom prst="rect">
+            <a:avLst/>
+          </a:prstGeom>
+          <a:noFill/>
+        </p:spPr>
+        <p:txBody>
+          <a:bodyPr wrap="none" rtlCol="0">
+            <a:spAutoFit/>
+          </a:bodyPr>
+          <a:lstStyle/>
+          <a:p>
+            <a:r>
+              <a:rPr kumimoji="1" lang="en-US" altLang="ja-JP" sz="2800" b="1" dirty="0">
+                <a:latin typeface="BIZ UDPゴシック" panose="020B0400000000000000" pitchFamily="50" charset="-128"/>
+                <a:ea typeface="BIZ UDPゴシック" panose="020B0400000000000000" pitchFamily="50" charset="-128"/>
+              </a:rPr>
+              <a:t>MAP</a:t>
+            </a:r>
+            <a:r>
+              <a:rPr kumimoji="1" lang="ja-JP" altLang="en-US" sz="2800" b="1" dirty="0">
+                <a:latin typeface="BIZ UDPゴシック" panose="020B0400000000000000" pitchFamily="50" charset="-128"/>
+                <a:ea typeface="BIZ UDPゴシック" panose="020B0400000000000000" pitchFamily="50" charset="-128"/>
+              </a:rPr>
+              <a:t>画面（上部）</a:t>
+            </a:r>
+            <a:endParaRPr kumimoji="1" lang="en-US" altLang="ja-JP" sz="2800" b="1" dirty="0">
+              <a:latin typeface="BIZ UDPゴシック" panose="020B0400000000000000" pitchFamily="50" charset="-128"/>
+              <a:ea typeface="BIZ UDPゴシック" panose="020B0400000000000000" pitchFamily="50" charset="-128"/>
+            </a:endParaRPr>
+          </a:p>
+          <a:p>
+            <a:r>
+              <a:rPr lang="ja-JP" altLang="en-US" sz="2000" dirty="0">
+                <a:latin typeface="BIZ UDPゴシック" panose="020B0400000000000000" pitchFamily="50" charset="-128"/>
+                <a:ea typeface="BIZ UDPゴシック" panose="020B0400000000000000" pitchFamily="50" charset="-128"/>
+              </a:rPr>
+              <a:t>・</a:t>
+            </a:r>
+            <a:r>
+              <a:rPr lang="ja-JP" altLang="ja-JP" sz="2000" dirty="0">
+                <a:latin typeface="BIZ UDPゴシック" panose="020B0400000000000000" pitchFamily="50" charset="-128"/>
+                <a:ea typeface="BIZ UDPゴシック" panose="020B0400000000000000" pitchFamily="50" charset="-128"/>
+              </a:rPr>
+              <a:t>マップ</a:t>
+            </a:r>
+            <a:r>
+              <a:rPr lang="ja-JP" altLang="en-US" sz="2000" dirty="0">
+                <a:latin typeface="BIZ UDPゴシック" panose="020B0400000000000000" pitchFamily="50" charset="-128"/>
+                <a:ea typeface="BIZ UDPゴシック" panose="020B0400000000000000" pitchFamily="50" charset="-128"/>
+              </a:rPr>
+              <a:t>　・</a:t>
+            </a:r>
+            <a:r>
+              <a:rPr lang="ja-JP" altLang="ja-JP" sz="2000" dirty="0">
+                <a:latin typeface="BIZ UDPゴシック" panose="020B0400000000000000" pitchFamily="50" charset="-128"/>
+                <a:ea typeface="BIZ UDPゴシック" panose="020B0400000000000000" pitchFamily="50" charset="-128"/>
+              </a:rPr>
+              <a:t>プレイヤー</a:t>
+            </a:r>
+            <a:r>
+              <a:rPr lang="ja-JP" altLang="en-US" sz="2000" dirty="0">
+                <a:latin typeface="BIZ UDPゴシック" panose="020B0400000000000000" pitchFamily="50" charset="-128"/>
+                <a:ea typeface="BIZ UDPゴシック" panose="020B0400000000000000" pitchFamily="50" charset="-128"/>
+              </a:rPr>
+              <a:t>　・</a:t>
+            </a:r>
+            <a:r>
+              <a:rPr lang="ja-JP" altLang="ja-JP" sz="2000" dirty="0">
+                <a:latin typeface="BIZ UDPゴシック" panose="020B0400000000000000" pitchFamily="50" charset="-128"/>
+                <a:ea typeface="BIZ UDPゴシック" panose="020B0400000000000000" pitchFamily="50" charset="-128"/>
+              </a:rPr>
+              <a:t>敵</a:t>
+            </a:r>
+            <a:r>
+              <a:rPr lang="ja-JP" altLang="en-US" sz="2000" dirty="0">
+                <a:latin typeface="BIZ UDPゴシック" panose="020B0400000000000000" pitchFamily="50" charset="-128"/>
+                <a:ea typeface="BIZ UDPゴシック" panose="020B0400000000000000" pitchFamily="50" charset="-128"/>
+              </a:rPr>
+              <a:t>　・</a:t>
+            </a:r>
+            <a:r>
+              <a:rPr lang="ja-JP" altLang="ja-JP" sz="2000" dirty="0">
+                <a:latin typeface="BIZ UDPゴシック" panose="020B0400000000000000" pitchFamily="50" charset="-128"/>
+                <a:ea typeface="BIZ UDPゴシック" panose="020B0400000000000000" pitchFamily="50" charset="-128"/>
+              </a:rPr>
+              <a:t>各種ギミック</a:t>
+            </a:r>
+            <a:endParaRPr lang="en-US" altLang="ja-JP" sz="2000" dirty="0">
+              <a:latin typeface="BIZ UDPゴシック" panose="020B0400000000000000" pitchFamily="50" charset="-128"/>
+              <a:ea typeface="BIZ UDPゴシック" panose="020B0400000000000000" pitchFamily="50" charset="-128"/>
+            </a:endParaRPr>
+          </a:p>
+          <a:p>
+            <a:r>
+              <a:rPr lang="ja-JP" altLang="en-US" sz="2000" dirty="0">
+                <a:latin typeface="BIZ UDPゴシック" panose="020B0400000000000000" pitchFamily="50" charset="-128"/>
+                <a:ea typeface="BIZ UDPゴシック" panose="020B0400000000000000" pitchFamily="50" charset="-128"/>
+              </a:rPr>
+              <a:t>・</a:t>
+            </a:r>
+            <a:r>
+              <a:rPr lang="ja-JP" altLang="ja-JP" sz="2000" dirty="0">
+                <a:latin typeface="BIZ UDPゴシック" panose="020B0400000000000000" pitchFamily="50" charset="-128"/>
+                <a:ea typeface="BIZ UDPゴシック" panose="020B0400000000000000" pitchFamily="50" charset="-128"/>
+              </a:rPr>
+              <a:t>アイテム</a:t>
+            </a:r>
+            <a:r>
+              <a:rPr lang="ja-JP" altLang="en-US" sz="2000" dirty="0">
+                <a:latin typeface="BIZ UDPゴシック" panose="020B0400000000000000" pitchFamily="50" charset="-128"/>
+                <a:ea typeface="BIZ UDPゴシック" panose="020B0400000000000000" pitchFamily="50" charset="-128"/>
+              </a:rPr>
+              <a:t>　</a:t>
+            </a:r>
+            <a:r>
+              <a:rPr lang="ja-JP" altLang="ja-JP" sz="2000" dirty="0">
+                <a:latin typeface="BIZ UDPゴシック" panose="020B0400000000000000" pitchFamily="50" charset="-128"/>
+                <a:ea typeface="BIZ UDPゴシック" panose="020B0400000000000000" pitchFamily="50" charset="-128"/>
+              </a:rPr>
+              <a:t>を全画面視認可能に配置。</a:t>
+            </a:r>
+            <a:endParaRPr lang="en-US" altLang="ja-JP" sz="2000" dirty="0">
+              <a:latin typeface="BIZ UDPゴシック" panose="020B0400000000000000" pitchFamily="50" charset="-128"/>
+              <a:ea typeface="BIZ UDPゴシック" panose="020B0400000000000000" pitchFamily="50" charset="-128"/>
+            </a:endParaRPr>
+          </a:p>
+          <a:p>
+            <a:endParaRPr lang="en-US" altLang="ja-JP" sz="2800" b="1" dirty="0">
+              <a:latin typeface="BIZ UDPゴシック" panose="020B0400000000000000" pitchFamily="50" charset="-128"/>
+              <a:ea typeface="BIZ UDPゴシック" panose="020B0400000000000000" pitchFamily="50" charset="-128"/>
+            </a:endParaRPr>
+          </a:p>
+          <a:p>
+            <a:r>
+              <a:rPr lang="ja-JP" altLang="ja-JP" sz="2800" b="1" dirty="0">
+                <a:latin typeface="BIZ UDPゴシック" panose="020B0400000000000000" pitchFamily="50" charset="-128"/>
+                <a:ea typeface="BIZ UDPゴシック" panose="020B0400000000000000" pitchFamily="50" charset="-128"/>
+              </a:rPr>
+              <a:t>ステータスバー（中下部）</a:t>
+            </a:r>
+            <a:endParaRPr lang="en-US" altLang="ja-JP" sz="2800" b="1" dirty="0">
+              <a:latin typeface="BIZ UDPゴシック" panose="020B0400000000000000" pitchFamily="50" charset="-128"/>
+              <a:ea typeface="BIZ UDPゴシック" panose="020B0400000000000000" pitchFamily="50" charset="-128"/>
+            </a:endParaRPr>
+          </a:p>
+          <a:p>
+            <a:r>
+              <a:rPr lang="ja-JP" altLang="en-US" sz="2000" dirty="0">
+                <a:latin typeface="BIZ UDPゴシック" panose="020B0400000000000000" pitchFamily="50" charset="-128"/>
+                <a:ea typeface="BIZ UDPゴシック" panose="020B0400000000000000" pitchFamily="50" charset="-128"/>
+              </a:rPr>
+              <a:t>・</a:t>
+            </a:r>
+            <a:r>
+              <a:rPr lang="ja-JP" altLang="ja-JP" sz="2000" dirty="0">
+                <a:latin typeface="BIZ UDPゴシック" panose="020B0400000000000000" pitchFamily="50" charset="-128"/>
+                <a:ea typeface="BIZ UDPゴシック" panose="020B0400000000000000" pitchFamily="50" charset="-128"/>
+              </a:rPr>
+              <a:t>敵の数</a:t>
+            </a:r>
+            <a:r>
+              <a:rPr lang="ja-JP" altLang="en-US" sz="2000" dirty="0">
+                <a:latin typeface="BIZ UDPゴシック" panose="020B0400000000000000" pitchFamily="50" charset="-128"/>
+                <a:ea typeface="BIZ UDPゴシック" panose="020B0400000000000000" pitchFamily="50" charset="-128"/>
+              </a:rPr>
+              <a:t>　・</a:t>
+            </a:r>
+            <a:r>
+              <a:rPr lang="ja-JP" altLang="ja-JP" sz="2000" dirty="0">
+                <a:latin typeface="BIZ UDPゴシック" panose="020B0400000000000000" pitchFamily="50" charset="-128"/>
+                <a:ea typeface="BIZ UDPゴシック" panose="020B0400000000000000" pitchFamily="50" charset="-128"/>
+              </a:rPr>
+              <a:t>宝の数</a:t>
+            </a:r>
+            <a:r>
+              <a:rPr lang="ja-JP" altLang="en-US" sz="2000" dirty="0">
+                <a:latin typeface="BIZ UDPゴシック" panose="020B0400000000000000" pitchFamily="50" charset="-128"/>
+                <a:ea typeface="BIZ UDPゴシック" panose="020B0400000000000000" pitchFamily="50" charset="-128"/>
+              </a:rPr>
+              <a:t>　・</a:t>
+            </a:r>
+            <a:r>
+              <a:rPr lang="ja-JP" altLang="ja-JP" sz="2000" dirty="0">
+                <a:latin typeface="BIZ UDPゴシック" panose="020B0400000000000000" pitchFamily="50" charset="-128"/>
+                <a:ea typeface="BIZ UDPゴシック" panose="020B0400000000000000" pitchFamily="50" charset="-128"/>
+              </a:rPr>
+              <a:t>残り時間</a:t>
+            </a:r>
+            <a:r>
+              <a:rPr lang="ja-JP" altLang="en-US" sz="2000" dirty="0">
+                <a:latin typeface="BIZ UDPゴシック" panose="020B0400000000000000" pitchFamily="50" charset="-128"/>
+                <a:ea typeface="BIZ UDPゴシック" panose="020B0400000000000000" pitchFamily="50" charset="-128"/>
+              </a:rPr>
+              <a:t>　・</a:t>
+            </a:r>
+            <a:r>
+              <a:rPr lang="ja-JP" altLang="ja-JP" sz="2000" dirty="0">
+                <a:latin typeface="BIZ UDPゴシック" panose="020B0400000000000000" pitchFamily="50" charset="-128"/>
+                <a:ea typeface="BIZ UDPゴシック" panose="020B0400000000000000" pitchFamily="50" charset="-128"/>
+              </a:rPr>
+              <a:t>スコア</a:t>
+            </a:r>
+            <a:r>
+              <a:rPr lang="ja-JP" altLang="en-US" sz="2000" dirty="0">
+                <a:latin typeface="BIZ UDPゴシック" panose="020B0400000000000000" pitchFamily="50" charset="-128"/>
+                <a:ea typeface="BIZ UDPゴシック" panose="020B0400000000000000" pitchFamily="50" charset="-128"/>
+              </a:rPr>
+              <a:t>　</a:t>
+            </a:r>
+            <a:endParaRPr lang="en-US" altLang="ja-JP" sz="2000" dirty="0">
+              <a:latin typeface="BIZ UDPゴシック" panose="020B0400000000000000" pitchFamily="50" charset="-128"/>
+              <a:ea typeface="BIZ UDPゴシック" panose="020B0400000000000000" pitchFamily="50" charset="-128"/>
+            </a:endParaRPr>
+          </a:p>
+          <a:p>
+            <a:r>
+              <a:rPr lang="ja-JP" altLang="en-US" sz="2000" dirty="0">
+                <a:latin typeface="BIZ UDPゴシック" panose="020B0400000000000000" pitchFamily="50" charset="-128"/>
+                <a:ea typeface="BIZ UDPゴシック" panose="020B0400000000000000" pitchFamily="50" charset="-128"/>
+              </a:rPr>
+              <a:t>・</a:t>
+            </a:r>
+            <a:r>
+              <a:rPr lang="ja-JP" altLang="ja-JP" sz="2000" dirty="0">
+                <a:latin typeface="BIZ UDPゴシック" panose="020B0400000000000000" pitchFamily="50" charset="-128"/>
+                <a:ea typeface="BIZ UDPゴシック" panose="020B0400000000000000" pitchFamily="50" charset="-128"/>
+              </a:rPr>
+              <a:t>バリア残数</a:t>
+            </a:r>
+            <a:r>
+              <a:rPr lang="ja-JP" altLang="en-US" sz="2000" dirty="0">
+                <a:latin typeface="BIZ UDPゴシック" panose="020B0400000000000000" pitchFamily="50" charset="-128"/>
+                <a:ea typeface="BIZ UDPゴシック" panose="020B0400000000000000" pitchFamily="50" charset="-128"/>
+              </a:rPr>
+              <a:t>　</a:t>
+            </a:r>
+            <a:r>
+              <a:rPr lang="ja-JP" altLang="ja-JP" sz="2000" dirty="0">
+                <a:latin typeface="BIZ UDPゴシック" panose="020B0400000000000000" pitchFamily="50" charset="-128"/>
+                <a:ea typeface="BIZ UDPゴシック" panose="020B0400000000000000" pitchFamily="50" charset="-128"/>
+              </a:rPr>
+              <a:t>を表示。</a:t>
+            </a:r>
+            <a:endParaRPr lang="en-US" altLang="ja-JP" sz="2000" dirty="0">
+              <a:latin typeface="BIZ UDPゴシック" panose="020B0400000000000000" pitchFamily="50" charset="-128"/>
+              <a:ea typeface="BIZ UDPゴシック" panose="020B0400000000000000" pitchFamily="50" charset="-128"/>
+            </a:endParaRPr>
+          </a:p>
+          <a:p>
+            <a:endParaRPr lang="en-US" altLang="ja-JP" sz="2800" b="1" dirty="0">
+              <a:latin typeface="BIZ UDPゴシック" panose="020B0400000000000000" pitchFamily="50" charset="-128"/>
+              <a:ea typeface="BIZ UDPゴシック" panose="020B0400000000000000" pitchFamily="50" charset="-128"/>
+            </a:endParaRPr>
+          </a:p>
+          <a:p>
+            <a:r>
+              <a:rPr lang="ja-JP" altLang="ja-JP" sz="2800" b="1" dirty="0">
+                <a:latin typeface="BIZ UDPゴシック" panose="020B0400000000000000" pitchFamily="50" charset="-128"/>
+                <a:ea typeface="BIZ UDPゴシック" panose="020B0400000000000000" pitchFamily="50" charset="-128"/>
+              </a:rPr>
+              <a:t>メッセージダイアログ（最下部）</a:t>
+            </a:r>
+            <a:endParaRPr lang="en-US" altLang="ja-JP" sz="2800" b="1" dirty="0">
+              <a:latin typeface="BIZ UDPゴシック" panose="020B0400000000000000" pitchFamily="50" charset="-128"/>
+              <a:ea typeface="BIZ UDPゴシック" panose="020B0400000000000000" pitchFamily="50" charset="-128"/>
+            </a:endParaRPr>
+          </a:p>
+          <a:p>
+            <a:r>
+              <a:rPr lang="ja-JP" altLang="ja-JP" sz="2000" dirty="0">
+                <a:latin typeface="BIZ UDPゴシック" panose="020B0400000000000000" pitchFamily="50" charset="-128"/>
+                <a:ea typeface="BIZ UDPゴシック" panose="020B0400000000000000" pitchFamily="50" charset="-128"/>
+              </a:rPr>
+              <a:t>「ゲームスタート！」や宝獲得通知メッセージ</a:t>
+            </a:r>
+            <a:r>
+              <a:rPr lang="ja-JP" altLang="en-US" sz="2000" dirty="0">
+                <a:latin typeface="BIZ UDPゴシック" panose="020B0400000000000000" pitchFamily="50" charset="-128"/>
+                <a:ea typeface="BIZ UDPゴシック" panose="020B0400000000000000" pitchFamily="50" charset="-128"/>
+              </a:rPr>
+              <a:t>、</a:t>
+            </a:r>
+            <a:endParaRPr lang="en-US" altLang="ja-JP" sz="2000" dirty="0">
+              <a:latin typeface="BIZ UDPゴシック" panose="020B0400000000000000" pitchFamily="50" charset="-128"/>
+              <a:ea typeface="BIZ UDPゴシック" panose="020B0400000000000000" pitchFamily="50" charset="-128"/>
+            </a:endParaRPr>
+          </a:p>
+          <a:p>
+            <a:r>
+              <a:rPr lang="ja-JP" altLang="en-US" sz="2000" dirty="0">
+                <a:latin typeface="BIZ UDPゴシック" panose="020B0400000000000000" pitchFamily="50" charset="-128"/>
+                <a:ea typeface="BIZ UDPゴシック" panose="020B0400000000000000" pitchFamily="50" charset="-128"/>
+              </a:rPr>
+              <a:t>アイテム入手メッセージの</a:t>
+            </a:r>
+            <a:r>
+              <a:rPr lang="ja-JP" altLang="ja-JP" sz="2000" dirty="0">
+                <a:latin typeface="BIZ UDPゴシック" panose="020B0400000000000000" pitchFamily="50" charset="-128"/>
+                <a:ea typeface="BIZ UDPゴシック" panose="020B0400000000000000" pitchFamily="50" charset="-128"/>
+              </a:rPr>
+              <a:t>リアルタイム表示</a:t>
+            </a:r>
+            <a:endParaRPr lang="en-US" altLang="ja-JP" sz="2000" b="1" dirty="0">
+              <a:latin typeface="BIZ UDPゴシック" panose="020B0400000000000000" pitchFamily="50" charset="-128"/>
+              <a:ea typeface="BIZ UDPゴシック" panose="020B0400000000000000" pitchFamily="50" charset="-128"/>
+            </a:endParaRPr>
+          </a:p>
+        </p:txBody>
+      </p:sp>
+      <p:pic>
+        <p:nvPicPr>
+          <p:cNvPr id="6" name="図 5">
+            <a:extLst>
+              <a:ext uri="{FF2B5EF4-FFF2-40B4-BE49-F238E27FC236}">
+                <a16:creationId xmlns:a16="http://schemas.microsoft.com/office/drawing/2014/main" id="{5DD1AC86-8503-4646-DC9B-D1B40765E697}"/>
+              </a:ext>
+            </a:extLst>
+          </p:cNvPr>
+          <p:cNvPicPr>
+            <a:picLocks noChangeAspect="1"/>
+          </p:cNvPicPr>
+          <p:nvPr/>
+        </p:nvPicPr>
+        <p:blipFill>
+          <a:blip r:embed="rId3"/>
+          <a:stretch>
+            <a:fillRect/>
+          </a:stretch>
+        </p:blipFill>
+        <p:spPr>
+          <a:xfrm>
+            <a:off x="6737469" y="5546157"/>
+            <a:ext cx="4956531" cy="786036"/>
+          </a:xfrm>
+          <a:prstGeom prst="rect">
+            <a:avLst/>
+          </a:prstGeom>
+        </p:spPr>
+      </p:pic>
+      <p:sp>
+        <p:nvSpPr>
+          <p:cNvPr id="9" name="テキスト ボックス 8">
+            <a:extLst>
+              <a:ext uri="{FF2B5EF4-FFF2-40B4-BE49-F238E27FC236}">
+                <a16:creationId xmlns:a16="http://schemas.microsoft.com/office/drawing/2014/main" id="{824326BC-9ABD-2148-3957-6EC8FD693603}"/>
+              </a:ext>
+            </a:extLst>
+          </p:cNvPr>
+          <p:cNvSpPr txBox="1"/>
+          <p:nvPr/>
+        </p:nvSpPr>
+        <p:spPr>
+          <a:xfrm>
+            <a:off x="6646078" y="5176825"/>
+            <a:ext cx="3647152" cy="369332"/>
+          </a:xfrm>
+          <a:prstGeom prst="rect">
+            <a:avLst/>
+          </a:prstGeom>
+          <a:noFill/>
+        </p:spPr>
+        <p:txBody>
+          <a:bodyPr wrap="none" rtlCol="0">
+            <a:spAutoFit/>
+          </a:bodyPr>
+          <a:lstStyle/>
+          <a:p>
+            <a:r>
+              <a:rPr kumimoji="1" lang="ja-JP" altLang="en-US" dirty="0"/>
+              <a:t>例：宝を入手した際のメッセージ</a:t>
+            </a:r>
+          </a:p>
+        </p:txBody>
+      </p:sp>
+    </p:spTree>
+    <p:extLst>
+      <p:ext uri="{BB962C8B-B14F-4D97-AF65-F5344CB8AC3E}">
+        <p14:creationId xmlns:p14="http://schemas.microsoft.com/office/powerpoint/2010/main" val="3293900075"/>
       </p:ext>
     </p:extLst>
   </p:cSld>
